--- a/docs/entreprise/deck/Quantinvo-tarification-marque.pptx
+++ b/docs/entreprise/deck/Quantinvo-tarification-marque.pptx
@@ -864,7 +864,7 @@
           <a:p>
             <a:r>
               <a:rPr lang="en-US" dirty="0"/>
-              <a:t>Annoncer le mensuel : un acheteur compare en mois. L'annuel se présente ensuite comme une économie en euros — 300 € sur Advanced —, jamais en pourcentage.</a:t>
+              <a:t>Annoncer le mensuel : un acheteur compare en mois. L'annuel se présente ensuite comme une économie en euros — 420 € sur Advanced —, jamais en pourcentage.</a:t>
             </a:r>
             <a:endParaRPr lang="en-US" dirty="0"/>
           </a:p>
@@ -2781,7 +2781,7 @@
                 <a:ea typeface="Inter" pitchFamily="34" charset="-122"/>
                 <a:cs typeface="Inter" pitchFamily="34" charset="-120"/>
               </a:rPr>
-              <a:t>À 2 400 € par an, une équipe de vingt personnes qui compte toute l'année coûte moins qu'un seul passage de prestataire dans la plupart des magasins.</a:t>
+              <a:t>À 3 300 € par an, une équipe de vingt personnes qui compte toute l'année coûte moins qu'un seul passage de prestataire dans la plupart des magasins.</a:t>
             </a:r>
             <a:endParaRPr lang="en-US" sz="1150" dirty="0"/>
           </a:p>
@@ -4085,7 +4085,7 @@
                 <a:ea typeface="Sora" pitchFamily="34" charset="-122"/>
                 <a:cs typeface="Sora" pitchFamily="34" charset="-120"/>
               </a:rPr>
-              <a:t>65 €</a:t>
+              <a:t>89 €</a:t>
             </a:r>
             <a:pPr indent="0" marL="0">
               <a:buNone/>
@@ -4138,7 +4138,7 @@
                 <a:ea typeface="Inter" pitchFamily="34" charset="-122"/>
                 <a:cs typeface="Inter" pitchFamily="34" charset="-120"/>
               </a:rPr>
-              <a:t>ou 690 € à l’année — 90 € de moins</a:t>
+              <a:t>ou 950 € à l’année — 118 € de moins</a:t>
             </a:r>
             <a:endParaRPr lang="en-US" sz="950" dirty="0"/>
           </a:p>
@@ -4528,7 +4528,7 @@
                 <a:ea typeface="Sora" pitchFamily="34" charset="-122"/>
                 <a:cs typeface="Sora" pitchFamily="34" charset="-120"/>
               </a:rPr>
-              <a:t>225 €</a:t>
+              <a:t>310 €</a:t>
             </a:r>
             <a:pPr indent="0" marL="0">
               <a:buNone/>
@@ -4581,7 +4581,7 @@
                 <a:ea typeface="Inter" pitchFamily="34" charset="-122"/>
                 <a:cs typeface="Inter" pitchFamily="34" charset="-120"/>
               </a:rPr>
-              <a:t>ou 2 400 € à l’année — 300 € de moins</a:t>
+              <a:t>ou 3 300 € à l’année — 420 € de moins</a:t>
             </a:r>
             <a:endParaRPr lang="en-US" sz="950" dirty="0"/>
           </a:p>
@@ -4932,7 +4932,7 @@
                 <a:ea typeface="Sora" pitchFamily="34" charset="-122"/>
                 <a:cs typeface="Sora" pitchFamily="34" charset="-120"/>
               </a:rPr>
-              <a:t>650 €</a:t>
+              <a:t>890 €</a:t>
             </a:r>
             <a:pPr indent="0" marL="0">
               <a:buNone/>
@@ -4985,7 +4985,7 @@
                 <a:ea typeface="Inter" pitchFamily="34" charset="-122"/>
                 <a:cs typeface="Inter" pitchFamily="34" charset="-120"/>
               </a:rPr>
-              <a:t>ou 6 900 € à l’année — 900 € de moins</a:t>
+              <a:t>ou 9 450 € à l’année — 1 230 € de moins</a:t>
             </a:r>
             <a:endParaRPr lang="en-US" sz="950" dirty="0"/>
           </a:p>
@@ -5192,7 +5192,7 @@
                 <a:ea typeface="Inter" pitchFamily="34" charset="-122"/>
                 <a:cs typeface="Inter" pitchFamily="34" charset="-120"/>
               </a:rPr>
-              <a:t>Plus de 100 appareils dans un même magasin ? 47 € par mois, ou 500 € à l’année, par tranche de 10 appareils supplémentaires.</a:t>
+              <a:t>Plus de 100 appareils dans un même magasin ? 64 € par mois, ou 690 € à l’année, par tranche de 10 appareils supplémentaires.</a:t>
             </a:r>
             <a:endParaRPr lang="en-US" sz="1100" dirty="0"/>
           </a:p>
@@ -7280,7 +7280,7 @@
                 <a:ea typeface="Sora" pitchFamily="34" charset="-122"/>
                 <a:cs typeface="Sora" pitchFamily="34" charset="-120"/>
               </a:rPr>
-              <a:t>65 €</a:t>
+              <a:t>89 €</a:t>
             </a:r>
             <a:endParaRPr lang="en-US" sz="1700" dirty="0"/>
           </a:p>
@@ -7319,7 +7319,7 @@
                 <a:ea typeface="Sora" pitchFamily="34" charset="-122"/>
                 <a:cs typeface="Sora" pitchFamily="34" charset="-120"/>
               </a:rPr>
-              <a:t>690 €</a:t>
+              <a:t>950 €</a:t>
             </a:r>
             <a:endParaRPr lang="en-US" sz="1700" dirty="0"/>
           </a:p>
@@ -7358,7 +7358,7 @@
                 <a:ea typeface="Sora" pitchFamily="34" charset="-122"/>
                 <a:cs typeface="Sora" pitchFamily="34" charset="-120"/>
               </a:rPr>
-              <a:t>90 €</a:t>
+              <a:t>118 €</a:t>
             </a:r>
             <a:endParaRPr lang="en-US" sz="1700" dirty="0"/>
           </a:p>
@@ -7498,7 +7498,7 @@
                 <a:ea typeface="Sora" pitchFamily="34" charset="-122"/>
                 <a:cs typeface="Sora" pitchFamily="34" charset="-120"/>
               </a:rPr>
-              <a:t>225 €</a:t>
+              <a:t>310 €</a:t>
             </a:r>
             <a:endParaRPr lang="en-US" sz="1700" dirty="0"/>
           </a:p>
@@ -7537,7 +7537,7 @@
                 <a:ea typeface="Sora" pitchFamily="34" charset="-122"/>
                 <a:cs typeface="Sora" pitchFamily="34" charset="-120"/>
               </a:rPr>
-              <a:t>2 400 €</a:t>
+              <a:t>3 300 €</a:t>
             </a:r>
             <a:endParaRPr lang="en-US" sz="1700" dirty="0"/>
           </a:p>
@@ -7576,7 +7576,7 @@
                 <a:ea typeface="Sora" pitchFamily="34" charset="-122"/>
                 <a:cs typeface="Sora" pitchFamily="34" charset="-120"/>
               </a:rPr>
-              <a:t>300 €</a:t>
+              <a:t>420 €</a:t>
             </a:r>
             <a:endParaRPr lang="en-US" sz="1700" dirty="0"/>
           </a:p>
@@ -7716,7 +7716,7 @@
                 <a:ea typeface="Sora" pitchFamily="34" charset="-122"/>
                 <a:cs typeface="Sora" pitchFamily="34" charset="-120"/>
               </a:rPr>
-              <a:t>650 €</a:t>
+              <a:t>890 €</a:t>
             </a:r>
             <a:endParaRPr lang="en-US" sz="1700" dirty="0"/>
           </a:p>
@@ -7755,7 +7755,7 @@
                 <a:ea typeface="Sora" pitchFamily="34" charset="-122"/>
                 <a:cs typeface="Sora" pitchFamily="34" charset="-120"/>
               </a:rPr>
-              <a:t>6 900 €</a:t>
+              <a:t>9 450 €</a:t>
             </a:r>
             <a:endParaRPr lang="en-US" sz="1700" dirty="0"/>
           </a:p>
@@ -7794,7 +7794,7 @@
                 <a:ea typeface="Sora" pitchFamily="34" charset="-122"/>
                 <a:cs typeface="Sora" pitchFamily="34" charset="-120"/>
               </a:rPr>
-              <a:t>900 €</a:t>
+              <a:t>1 230 €</a:t>
             </a:r>
             <a:endParaRPr lang="en-US" sz="1700" dirty="0"/>
           </a:p>

--- a/docs/entreprise/deck/Quantinvo-tarification-marque.pptx
+++ b/docs/entreprise/deck/Quantinvo-tarification-marque.pptx
@@ -1816,11 +1816,11 @@
             <a:r>
               <a:rPr lang="en-US" sz="2400" b="1" dirty="0">
                 <a:solidFill>
-                  <a:srgbClr val="0B0F19"/>
-                </a:solidFill>
-                <a:latin typeface="Sora" pitchFamily="34" charset="0"/>
-                <a:ea typeface="Sora" pitchFamily="34" charset="-122"/>
-                <a:cs typeface="Sora" pitchFamily="34" charset="-120"/>
+                  <a:srgbClr val="14181A"/>
+                </a:solidFill>
+                <a:latin typeface="Archivo" pitchFamily="34" charset="0"/>
+                <a:ea typeface="Archivo" pitchFamily="34" charset="-122"/>
+                <a:cs typeface="Archivo" pitchFamily="34" charset="-120"/>
               </a:rPr>
               <a:t>Quantinvo</a:t>
             </a:r>
@@ -1837,17 +1837,17 @@
         <p:spPr>
           <a:xfrm>
             <a:off x="731520" y="1481328"/>
-            <a:ext cx="2377440" cy="25603"/>
+            <a:ext cx="2011680" cy="20117"/>
           </a:xfrm>
           <a:prstGeom prst="rect">
             <a:avLst/>
           </a:prstGeom>
           <a:solidFill>
-            <a:srgbClr val="38C9FF"/>
+            <a:srgbClr val="14181A"/>
           </a:solidFill>
           <a:ln w="12700">
             <a:solidFill>
-              <a:srgbClr val="38C9FF"/>
+              <a:srgbClr val="14181A"/>
             </a:solidFill>
             <a:prstDash val="solid"/>
           </a:ln>
@@ -1880,11 +1880,11 @@
             <a:r>
               <a:rPr lang="en-US" sz="1300" dirty="0">
                 <a:solidFill>
-                  <a:srgbClr val="5B6475"/>
-                </a:solidFill>
-                <a:latin typeface="Inter" pitchFamily="34" charset="0"/>
-                <a:ea typeface="Inter" pitchFamily="34" charset="-122"/>
-                <a:cs typeface="Inter" pitchFamily="34" charset="-120"/>
+                  <a:srgbClr val="575F5C"/>
+                </a:solidFill>
+                <a:latin typeface="Public Sans" pitchFamily="34" charset="0"/>
+                <a:ea typeface="Public Sans" pitchFamily="34" charset="-122"/>
+                <a:cs typeface="Public Sans" pitchFamily="34" charset="-120"/>
               </a:rPr>
               <a:t>Tarification</a:t>
             </a:r>
@@ -1922,11 +1922,11 @@
             <a:r>
               <a:rPr lang="en-US" sz="4000" b="1" dirty="0">
                 <a:solidFill>
-                  <a:srgbClr val="4636B0"/>
-                </a:solidFill>
-                <a:latin typeface="Sora" pitchFamily="34" charset="0"/>
-                <a:ea typeface="Sora" pitchFamily="34" charset="-122"/>
-                <a:cs typeface="Sora" pitchFamily="34" charset="-120"/>
+                  <a:srgbClr val="14181A"/>
+                </a:solidFill>
+                <a:latin typeface="Archivo" pitchFamily="34" charset="0"/>
+                <a:ea typeface="Archivo" pitchFamily="34" charset="-122"/>
+                <a:cs typeface="Archivo" pitchFamily="34" charset="-120"/>
               </a:rPr>
               <a:t>Un prix calé sur le nombre de personnes qui comptent.</a:t>
             </a:r>
@@ -1964,11 +1964,11 @@
             <a:r>
               <a:rPr lang="en-US" sz="1500" dirty="0">
                 <a:solidFill>
-                  <a:srgbClr val="3D4556"/>
-                </a:solidFill>
-                <a:latin typeface="Inter" pitchFamily="34" charset="0"/>
-                <a:ea typeface="Inter" pitchFamily="34" charset="-122"/>
-                <a:cs typeface="Inter" pitchFamily="34" charset="-120"/>
+                  <a:srgbClr val="3A423F"/>
+                </a:solidFill>
+                <a:latin typeface="Public Sans" pitchFamily="34" charset="0"/>
+                <a:ea typeface="Public Sans" pitchFamily="34" charset="-122"/>
+                <a:cs typeface="Public Sans" pitchFamily="34" charset="-120"/>
               </a:rPr>
               <a:t>Rien à déclarer, rien à justifier, rien à régulariser en fin d'année. Le tarif est public, et il se souscrit en ligne.</a:t>
             </a:r>
@@ -2003,11 +2003,11 @@
             <a:r>
               <a:rPr lang="en-US" sz="1050" dirty="0">
                 <a:solidFill>
-                  <a:srgbClr val="5B6475"/>
-                </a:solidFill>
-                <a:latin typeface="Inter" pitchFamily="34" charset="0"/>
-                <a:ea typeface="Inter" pitchFamily="34" charset="-122"/>
-                <a:cs typeface="Inter" pitchFamily="34" charset="-120"/>
+                  <a:srgbClr val="575F5C"/>
+                </a:solidFill>
+                <a:latin typeface="Public Sans" pitchFamily="34" charset="0"/>
+                <a:ea typeface="Public Sans" pitchFamily="34" charset="-122"/>
+                <a:cs typeface="Public Sans" pitchFamily="34" charset="-120"/>
               </a:rPr>
               <a:t>Devkaylab  ·  août 2026  ·  www.quantinvo.com</a:t>
             </a:r>
@@ -2098,11 +2098,11 @@
             <a:r>
               <a:rPr lang="en-US" sz="1600" b="1" dirty="0">
                 <a:solidFill>
-                  <a:srgbClr val="0B0F19"/>
-                </a:solidFill>
-                <a:latin typeface="Sora" pitchFamily="34" charset="0"/>
-                <a:ea typeface="Sora" pitchFamily="34" charset="-122"/>
-                <a:cs typeface="Sora" pitchFamily="34" charset="-120"/>
+                  <a:srgbClr val="14181A"/>
+                </a:solidFill>
+                <a:latin typeface="Archivo" pitchFamily="34" charset="0"/>
+                <a:ea typeface="Archivo" pitchFamily="34" charset="-122"/>
+                <a:cs typeface="Archivo" pitchFamily="34" charset="-120"/>
               </a:rPr>
               <a:t>Quantinvo</a:t>
             </a:r>
@@ -2137,11 +2137,11 @@
             <a:r>
               <a:rPr lang="en-US" sz="1000" dirty="0">
                 <a:solidFill>
-                  <a:srgbClr val="5B6475"/>
-                </a:solidFill>
-                <a:latin typeface="Inter" pitchFamily="34" charset="0"/>
-                <a:ea typeface="Inter" pitchFamily="34" charset="-122"/>
-                <a:cs typeface="Inter" pitchFamily="34" charset="-120"/>
+                  <a:srgbClr val="575F5C"/>
+                </a:solidFill>
+                <a:latin typeface="Public Sans" pitchFamily="34" charset="0"/>
+                <a:ea typeface="Public Sans" pitchFamily="34" charset="-122"/>
+                <a:cs typeface="Public Sans" pitchFamily="34" charset="-120"/>
               </a:rPr>
               <a:t>Le budget</a:t>
             </a:r>
@@ -2158,17 +2158,17 @@
         <p:spPr>
           <a:xfrm>
             <a:off x="731520" y="877824"/>
-            <a:ext cx="10725912" cy="25603"/>
+            <a:ext cx="10725912" cy="10973"/>
           </a:xfrm>
           <a:prstGeom prst="rect">
             <a:avLst/>
           </a:prstGeom>
           <a:solidFill>
-            <a:srgbClr val="38C9FF"/>
+            <a:srgbClr val="E2E5E1"/>
           </a:solidFill>
           <a:ln w="12700">
             <a:solidFill>
-              <a:srgbClr val="38C9FF"/>
+              <a:srgbClr val="E2E5E1"/>
             </a:solidFill>
             <a:prstDash val="solid"/>
           </a:ln>
@@ -2204,11 +2204,11 @@
             <a:r>
               <a:rPr lang="en-US" sz="2600" b="1" dirty="0">
                 <a:solidFill>
-                  <a:srgbClr val="4636B0"/>
-                </a:solidFill>
-                <a:latin typeface="Sora" pitchFamily="34" charset="0"/>
-                <a:ea typeface="Sora" pitchFamily="34" charset="-122"/>
-                <a:cs typeface="Sora" pitchFamily="34" charset="-120"/>
+                  <a:srgbClr val="14181A"/>
+                </a:solidFill>
+                <a:latin typeface="Archivo" pitchFamily="34" charset="0"/>
+                <a:ea typeface="Archivo" pitchFamily="34" charset="-122"/>
+                <a:cs typeface="Archivo" pitchFamily="34" charset="-120"/>
               </a:rPr>
               <a:t>Ce que la licence remplace dans votre budget</a:t>
             </a:r>
@@ -2243,11 +2243,11 @@
             <a:r>
               <a:rPr lang="en-US" sz="1050" b="1" dirty="0">
                 <a:solidFill>
-                  <a:srgbClr val="5B6475"/>
-                </a:solidFill>
-                <a:latin typeface="Inter" pitchFamily="34" charset="0"/>
-                <a:ea typeface="Inter" pitchFamily="34" charset="-122"/>
-                <a:cs typeface="Inter" pitchFamily="34" charset="-120"/>
+                  <a:srgbClr val="575F5C"/>
+                </a:solidFill>
+                <a:latin typeface="Public Sans" pitchFamily="34" charset="0"/>
+                <a:ea typeface="Public Sans" pitchFamily="34" charset="-122"/>
+                <a:cs typeface="Public Sans" pitchFamily="34" charset="-120"/>
               </a:rPr>
               <a:t>Le budget d'inventaire d'un magasin</a:t>
             </a:r>
@@ -2282,11 +2282,11 @@
             <a:r>
               <a:rPr lang="en-US" sz="1050" b="1" dirty="0">
                 <a:solidFill>
-                  <a:srgbClr val="4636B0"/>
-                </a:solidFill>
-                <a:latin typeface="Inter" pitchFamily="34" charset="0"/>
-                <a:ea typeface="Inter" pitchFamily="34" charset="-122"/>
-                <a:cs typeface="Inter" pitchFamily="34" charset="-120"/>
+                  <a:srgbClr val="14181A"/>
+                </a:solidFill>
+                <a:latin typeface="Public Sans" pitchFamily="34" charset="0"/>
+                <a:ea typeface="Public Sans" pitchFamily="34" charset="-122"/>
+                <a:cs typeface="Public Sans" pitchFamily="34" charset="-120"/>
               </a:rPr>
               <a:t>Avec Quantinvo</a:t>
             </a:r>
@@ -2311,7 +2311,7 @@
           <a:noFill/>
           <a:ln w="9525">
             <a:solidFill>
-              <a:srgbClr val="E3E6EE"/>
+              <a:srgbClr val="E2E5E1"/>
             </a:solidFill>
             <a:prstDash val="solid"/>
           </a:ln>
@@ -2347,11 +2347,11 @@
             <a:r>
               <a:rPr lang="en-US" sz="1300" dirty="0">
                 <a:solidFill>
-                  <a:srgbClr val="3D4556"/>
-                </a:solidFill>
-                <a:latin typeface="Inter" pitchFamily="34" charset="0"/>
-                <a:ea typeface="Inter" pitchFamily="34" charset="-122"/>
-                <a:cs typeface="Inter" pitchFamily="34" charset="-120"/>
+                  <a:srgbClr val="3A423F"/>
+                </a:solidFill>
+                <a:latin typeface="Public Sans" pitchFamily="34" charset="0"/>
+                <a:ea typeface="Public Sans" pitchFamily="34" charset="-122"/>
+                <a:cs typeface="Public Sans" pitchFamily="34" charset="-120"/>
               </a:rPr>
               <a:t>Un prestataire de comptage, facturé à la pièce, une ou deux fois par an.</a:t>
             </a:r>
@@ -2389,11 +2389,11 @@
             <a:r>
               <a:rPr lang="en-US" sz="1300" dirty="0">
                 <a:solidFill>
-                  <a:srgbClr val="0B0F19"/>
-                </a:solidFill>
-                <a:latin typeface="Inter" pitchFamily="34" charset="0"/>
-                <a:ea typeface="Inter" pitchFamily="34" charset="-122"/>
-                <a:cs typeface="Inter" pitchFamily="34" charset="-120"/>
+                  <a:srgbClr val="14181A"/>
+                </a:solidFill>
+                <a:latin typeface="Public Sans" pitchFamily="34" charset="0"/>
+                <a:ea typeface="Public Sans" pitchFamily="34" charset="-122"/>
+                <a:cs typeface="Public Sans" pitchFamily="34" charset="-120"/>
               </a:rPr>
               <a:t>Vos équipes comptent, autant de fois que vous voulez, pour le même prix.</a:t>
             </a:r>
@@ -2418,7 +2418,7 @@
           <a:noFill/>
           <a:ln w="9525">
             <a:solidFill>
-              <a:srgbClr val="E3E6EE"/>
+              <a:srgbClr val="E2E5E1"/>
             </a:solidFill>
             <a:prstDash val="solid"/>
           </a:ln>
@@ -2454,11 +2454,11 @@
             <a:r>
               <a:rPr lang="en-US" sz="1300" dirty="0">
                 <a:solidFill>
-                  <a:srgbClr val="3D4556"/>
-                </a:solidFill>
-                <a:latin typeface="Inter" pitchFamily="34" charset="0"/>
-                <a:ea typeface="Inter" pitchFamily="34" charset="-122"/>
-                <a:cs typeface="Inter" pitchFamily="34" charset="-120"/>
+                  <a:srgbClr val="3A423F"/>
+                </a:solidFill>
+                <a:latin typeface="Public Sans" pitchFamily="34" charset="0"/>
+                <a:ea typeface="Public Sans" pitchFamily="34" charset="-122"/>
+                <a:cs typeface="Public Sans" pitchFamily="34" charset="-120"/>
               </a:rPr>
               <a:t>Une flotte de terminaux : achat ou location, maintenance, remplacement.</a:t>
             </a:r>
@@ -2496,11 +2496,11 @@
             <a:r>
               <a:rPr lang="en-US" sz="1300" dirty="0">
                 <a:solidFill>
-                  <a:srgbClr val="0B0F19"/>
-                </a:solidFill>
-                <a:latin typeface="Inter" pitchFamily="34" charset="0"/>
-                <a:ea typeface="Inter" pitchFamily="34" charset="-122"/>
-                <a:cs typeface="Inter" pitchFamily="34" charset="-120"/>
+                  <a:srgbClr val="14181A"/>
+                </a:solidFill>
+                <a:latin typeface="Public Sans" pitchFamily="34" charset="0"/>
+                <a:ea typeface="Public Sans" pitchFamily="34" charset="-122"/>
+                <a:cs typeface="Public Sans" pitchFamily="34" charset="-120"/>
               </a:rPr>
               <a:t>Aucun matériel. Les téléphones sont déjà là, et déjà payés.</a:t>
             </a:r>
@@ -2525,7 +2525,7 @@
           <a:noFill/>
           <a:ln w="9525">
             <a:solidFill>
-              <a:srgbClr val="E3E6EE"/>
+              <a:srgbClr val="E2E5E1"/>
             </a:solidFill>
             <a:prstDash val="solid"/>
           </a:ln>
@@ -2561,11 +2561,11 @@
             <a:r>
               <a:rPr lang="en-US" sz="1300" dirty="0">
                 <a:solidFill>
-                  <a:srgbClr val="3D4556"/>
-                </a:solidFill>
-                <a:latin typeface="Inter" pitchFamily="34" charset="0"/>
-                <a:ea typeface="Inter" pitchFamily="34" charset="-122"/>
-                <a:cs typeface="Inter" pitchFamily="34" charset="-120"/>
+                  <a:srgbClr val="3A423F"/>
+                </a:solidFill>
+                <a:latin typeface="Public Sans" pitchFamily="34" charset="0"/>
+                <a:ea typeface="Public Sans" pitchFamily="34" charset="-122"/>
+                <a:cs typeface="Public Sans" pitchFamily="34" charset="-120"/>
               </a:rPr>
               <a:t>Une licence logicielle sur devis, renégociée chaque année.</a:t>
             </a:r>
@@ -2603,11 +2603,11 @@
             <a:r>
               <a:rPr lang="en-US" sz="1300" dirty="0">
                 <a:solidFill>
-                  <a:srgbClr val="0B0F19"/>
-                </a:solidFill>
-                <a:latin typeface="Inter" pitchFamily="34" charset="0"/>
-                <a:ea typeface="Inter" pitchFamily="34" charset="-122"/>
-                <a:cs typeface="Inter" pitchFamily="34" charset="-120"/>
+                  <a:srgbClr val="14181A"/>
+                </a:solidFill>
+                <a:latin typeface="Public Sans" pitchFamily="34" charset="0"/>
+                <a:ea typeface="Public Sans" pitchFamily="34" charset="-122"/>
+                <a:cs typeface="Public Sans" pitchFamily="34" charset="-120"/>
               </a:rPr>
               <a:t>Un prix affiché, le même pour tout le monde, que vous souscrivez en ligne.</a:t>
             </a:r>
@@ -2632,7 +2632,7 @@
           <a:noFill/>
           <a:ln w="9525">
             <a:solidFill>
-              <a:srgbClr val="E3E6EE"/>
+              <a:srgbClr val="E2E5E1"/>
             </a:solidFill>
             <a:prstDash val="solid"/>
           </a:ln>
@@ -2668,11 +2668,11 @@
             <a:r>
               <a:rPr lang="en-US" sz="1300" dirty="0">
                 <a:solidFill>
-                  <a:srgbClr val="3D4556"/>
-                </a:solidFill>
-                <a:latin typeface="Inter" pitchFamily="34" charset="0"/>
-                <a:ea typeface="Inter" pitchFamily="34" charset="-122"/>
-                <a:cs typeface="Inter" pitchFamily="34" charset="-120"/>
+                  <a:srgbClr val="3A423F"/>
+                </a:solidFill>
+                <a:latin typeface="Public Sans" pitchFamily="34" charset="0"/>
+                <a:ea typeface="Public Sans" pitchFamily="34" charset="-122"/>
+                <a:cs typeface="Public Sans" pitchFamily="34" charset="-120"/>
               </a:rPr>
               <a:t>Les heures passées à préparer, surveiller et réconcilier.</a:t>
             </a:r>
@@ -2710,11 +2710,11 @@
             <a:r>
               <a:rPr lang="en-US" sz="1300" dirty="0">
                 <a:solidFill>
-                  <a:srgbClr val="0B0F19"/>
-                </a:solidFill>
-                <a:latin typeface="Inter" pitchFamily="34" charset="0"/>
-                <a:ea typeface="Inter" pitchFamily="34" charset="-122"/>
-                <a:cs typeface="Inter" pitchFamily="34" charset="-120"/>
+                  <a:srgbClr val="14181A"/>
+                </a:solidFill>
+                <a:latin typeface="Public Sans" pitchFamily="34" charset="0"/>
+                <a:ea typeface="Public Sans" pitchFamily="34" charset="-122"/>
+                <a:cs typeface="Public Sans" pitchFamily="34" charset="-120"/>
               </a:rPr>
               <a:t>Le rapport sort croisé avec votre stock théorique. Il ne reste qu’à ajuster.</a:t>
             </a:r>
@@ -2739,7 +2739,7 @@
           <a:noFill/>
           <a:ln w="9525">
             <a:solidFill>
-              <a:srgbClr val="E3E6EE"/>
+              <a:srgbClr val="E2E5E1"/>
             </a:solidFill>
             <a:prstDash val="solid"/>
           </a:ln>
@@ -2775,11 +2775,11 @@
             <a:r>
               <a:rPr lang="en-US" sz="1150" i="1" dirty="0">
                 <a:solidFill>
-                  <a:srgbClr val="5B6475"/>
-                </a:solidFill>
-                <a:latin typeface="Inter" pitchFamily="34" charset="0"/>
-                <a:ea typeface="Inter" pitchFamily="34" charset="-122"/>
-                <a:cs typeface="Inter" pitchFamily="34" charset="-120"/>
+                  <a:srgbClr val="575F5C"/>
+                </a:solidFill>
+                <a:latin typeface="Public Sans" pitchFamily="34" charset="0"/>
+                <a:ea typeface="Public Sans" pitchFamily="34" charset="-122"/>
+                <a:cs typeface="Public Sans" pitchFamily="34" charset="-120"/>
               </a:rPr>
               <a:t>À 3 300 € par an, une équipe de vingt personnes qui compte toute l'année coûte moins qu'un seul passage de prestataire dans la plupart des magasins.</a:t>
             </a:r>
@@ -2814,11 +2814,11 @@
             <a:r>
               <a:rPr lang="en-US" sz="900" dirty="0">
                 <a:solidFill>
-                  <a:srgbClr val="5B6475"/>
-                </a:solidFill>
-                <a:latin typeface="Inter" pitchFamily="34" charset="0"/>
-                <a:ea typeface="Inter" pitchFamily="34" charset="-122"/>
-                <a:cs typeface="Inter" pitchFamily="34" charset="-120"/>
+                  <a:srgbClr val="575F5C"/>
+                </a:solidFill>
+                <a:latin typeface="Public Sans" pitchFamily="34" charset="0"/>
+                <a:ea typeface="Public Sans" pitchFamily="34" charset="-122"/>
+                <a:cs typeface="Public Sans" pitchFamily="34" charset="-120"/>
               </a:rPr>
               <a:t>Quantinvo · tarification · août 2026</a:t>
             </a:r>
@@ -2853,11 +2853,11 @@
             <a:r>
               <a:rPr lang="en-US" sz="900" dirty="0">
                 <a:solidFill>
-                  <a:srgbClr val="5B6475"/>
-                </a:solidFill>
-                <a:latin typeface="Inter" pitchFamily="34" charset="0"/>
-                <a:ea typeface="Inter" pitchFamily="34" charset="-122"/>
-                <a:cs typeface="Inter" pitchFamily="34" charset="-120"/>
+                  <a:srgbClr val="575F5C"/>
+                </a:solidFill>
+                <a:latin typeface="Public Sans" pitchFamily="34" charset="0"/>
+                <a:ea typeface="Public Sans" pitchFamily="34" charset="-122"/>
+                <a:cs typeface="Public Sans" pitchFamily="34" charset="-120"/>
               </a:rPr>
               <a:t>10</a:t>
             </a:r>
@@ -2948,11 +2948,11 @@
             <a:r>
               <a:rPr lang="en-US" sz="2400" b="1" dirty="0">
                 <a:solidFill>
-                  <a:srgbClr val="0B0F19"/>
-                </a:solidFill>
-                <a:latin typeface="Sora" pitchFamily="34" charset="0"/>
-                <a:ea typeface="Sora" pitchFamily="34" charset="-122"/>
-                <a:cs typeface="Sora" pitchFamily="34" charset="-120"/>
+                  <a:srgbClr val="14181A"/>
+                </a:solidFill>
+                <a:latin typeface="Archivo" pitchFamily="34" charset="0"/>
+                <a:ea typeface="Archivo" pitchFamily="34" charset="-122"/>
+                <a:cs typeface="Archivo" pitchFamily="34" charset="-120"/>
               </a:rPr>
               <a:t>Quantinvo</a:t>
             </a:r>
@@ -2969,17 +2969,17 @@
         <p:spPr>
           <a:xfrm>
             <a:off x="731520" y="1481328"/>
-            <a:ext cx="2377440" cy="25603"/>
+            <a:ext cx="2011680" cy="20117"/>
           </a:xfrm>
           <a:prstGeom prst="rect">
             <a:avLst/>
           </a:prstGeom>
           <a:solidFill>
-            <a:srgbClr val="38C9FF"/>
+            <a:srgbClr val="14181A"/>
           </a:solidFill>
           <a:ln w="12700">
             <a:solidFill>
-              <a:srgbClr val="38C9FF"/>
+              <a:srgbClr val="14181A"/>
             </a:solidFill>
             <a:prstDash val="solid"/>
           </a:ln>
@@ -3015,11 +3015,11 @@
             <a:r>
               <a:rPr lang="en-US" sz="3600" b="1" dirty="0">
                 <a:solidFill>
-                  <a:srgbClr val="4636B0"/>
-                </a:solidFill>
-                <a:latin typeface="Sora" pitchFamily="34" charset="0"/>
-                <a:ea typeface="Sora" pitchFamily="34" charset="-122"/>
-                <a:cs typeface="Sora" pitchFamily="34" charset="-120"/>
+                  <a:srgbClr val="14181A"/>
+                </a:solidFill>
+                <a:latin typeface="Archivo" pitchFamily="34" charset="0"/>
+                <a:ea typeface="Archivo" pitchFamily="34" charset="-122"/>
+                <a:cs typeface="Archivo" pitchFamily="34" charset="-120"/>
               </a:rPr>
               <a:t>Combien de personnes comptent chez vous ?</a:t>
             </a:r>
@@ -3057,11 +3057,11 @@
             <a:r>
               <a:rPr lang="en-US" sz="1450" dirty="0">
                 <a:solidFill>
-                  <a:srgbClr val="3D4556"/>
-                </a:solidFill>
-                <a:latin typeface="Inter" pitchFamily="34" charset="0"/>
-                <a:ea typeface="Inter" pitchFamily="34" charset="-122"/>
-                <a:cs typeface="Inter" pitchFamily="34" charset="-120"/>
+                  <a:srgbClr val="3A423F"/>
+                </a:solidFill>
+                <a:latin typeface="Public Sans" pitchFamily="34" charset="0"/>
+                <a:ea typeface="Public Sans" pitchFamily="34" charset="-122"/>
+                <a:cs typeface="Public Sans" pitchFamily="34" charset="-120"/>
               </a:rPr>
               <a:t>C'est la seule question à laquelle il faut répondre pour connaître votre prix. Dites-nous le chiffre, on vous dit l'offre — et si vous avez plusieurs magasins, on établit le devis de l'ensemble.</a:t>
             </a:r>
@@ -3096,11 +3096,11 @@
             <a:r>
               <a:rPr lang="en-US" sz="1500" b="1" dirty="0">
                 <a:solidFill>
-                  <a:srgbClr val="4636B0"/>
-                </a:solidFill>
-                <a:latin typeface="Sora" pitchFamily="34" charset="0"/>
-                <a:ea typeface="Sora" pitchFamily="34" charset="-122"/>
-                <a:cs typeface="Sora" pitchFamily="34" charset="-120"/>
+                  <a:srgbClr val="14181A"/>
+                </a:solidFill>
+                <a:latin typeface="Archivo" pitchFamily="34" charset="0"/>
+                <a:ea typeface="Archivo" pitchFamily="34" charset="-122"/>
+                <a:cs typeface="Archivo" pitchFamily="34" charset="-120"/>
               </a:rPr>
               <a:t>contact@quantinvo.com   ·   www.quantinvo.com/tarifs</a:t>
             </a:r>
@@ -3135,11 +3135,11 @@
             <a:r>
               <a:rPr lang="en-US" sz="1050" dirty="0">
                 <a:solidFill>
-                  <a:srgbClr val="5B6475"/>
-                </a:solidFill>
-                <a:latin typeface="Inter" pitchFamily="34" charset="0"/>
-                <a:ea typeface="Inter" pitchFamily="34" charset="-122"/>
-                <a:cs typeface="Inter" pitchFamily="34" charset="-120"/>
+                  <a:srgbClr val="575F5C"/>
+                </a:solidFill>
+                <a:latin typeface="Public Sans" pitchFamily="34" charset="0"/>
+                <a:ea typeface="Public Sans" pitchFamily="34" charset="-122"/>
+                <a:cs typeface="Public Sans" pitchFamily="34" charset="-120"/>
               </a:rPr>
               <a:t>Prix hors taxes, par magasin. Sans engagement au mois. Aucun matériel à acheter.</a:t>
             </a:r>
@@ -3230,11 +3230,11 @@
             <a:r>
               <a:rPr lang="en-US" sz="1600" b="1" dirty="0">
                 <a:solidFill>
-                  <a:srgbClr val="0B0F19"/>
-                </a:solidFill>
-                <a:latin typeface="Sora" pitchFamily="34" charset="0"/>
-                <a:ea typeface="Sora" pitchFamily="34" charset="-122"/>
-                <a:cs typeface="Sora" pitchFamily="34" charset="-120"/>
+                  <a:srgbClr val="14181A"/>
+                </a:solidFill>
+                <a:latin typeface="Archivo" pitchFamily="34" charset="0"/>
+                <a:ea typeface="Archivo" pitchFamily="34" charset="-122"/>
+                <a:cs typeface="Archivo" pitchFamily="34" charset="-120"/>
               </a:rPr>
               <a:t>Quantinvo</a:t>
             </a:r>
@@ -3269,11 +3269,11 @@
             <a:r>
               <a:rPr lang="en-US" sz="1000" dirty="0">
                 <a:solidFill>
-                  <a:srgbClr val="5B6475"/>
-                </a:solidFill>
-                <a:latin typeface="Inter" pitchFamily="34" charset="0"/>
-                <a:ea typeface="Inter" pitchFamily="34" charset="-122"/>
-                <a:cs typeface="Inter" pitchFamily="34" charset="-120"/>
+                  <a:srgbClr val="575F5C"/>
+                </a:solidFill>
+                <a:latin typeface="Public Sans" pitchFamily="34" charset="0"/>
+                <a:ea typeface="Public Sans" pitchFamily="34" charset="-122"/>
+                <a:cs typeface="Public Sans" pitchFamily="34" charset="-120"/>
               </a:rPr>
               <a:t>Le principe</a:t>
             </a:r>
@@ -3290,17 +3290,17 @@
         <p:spPr>
           <a:xfrm>
             <a:off x="731520" y="877824"/>
-            <a:ext cx="10725912" cy="25603"/>
+            <a:ext cx="10725912" cy="10973"/>
           </a:xfrm>
           <a:prstGeom prst="rect">
             <a:avLst/>
           </a:prstGeom>
           <a:solidFill>
-            <a:srgbClr val="38C9FF"/>
+            <a:srgbClr val="E2E5E1"/>
           </a:solidFill>
           <a:ln w="12700">
             <a:solidFill>
-              <a:srgbClr val="38C9FF"/>
+              <a:srgbClr val="E2E5E1"/>
             </a:solidFill>
             <a:prstDash val="solid"/>
           </a:ln>
@@ -3336,11 +3336,11 @@
             <a:r>
               <a:rPr lang="en-US" sz="2600" b="1" dirty="0">
                 <a:solidFill>
-                  <a:srgbClr val="4636B0"/>
-                </a:solidFill>
-                <a:latin typeface="Sora" pitchFamily="34" charset="0"/>
-                <a:ea typeface="Sora" pitchFamily="34" charset="-122"/>
-                <a:cs typeface="Sora" pitchFamily="34" charset="-120"/>
+                  <a:srgbClr val="14181A"/>
+                </a:solidFill>
+                <a:latin typeface="Archivo" pitchFamily="34" charset="0"/>
+                <a:ea typeface="Archivo" pitchFamily="34" charset="-122"/>
+                <a:cs typeface="Archivo" pitchFamily="34" charset="-120"/>
               </a:rPr>
               <a:t>Nous facturons la seule chose que vous puissiez vérifier.</a:t>
             </a:r>
@@ -3378,11 +3378,11 @@
             <a:r>
               <a:rPr lang="en-US" sz="1250" i="1" dirty="0">
                 <a:solidFill>
-                  <a:srgbClr val="5B6475"/>
-                </a:solidFill>
-                <a:latin typeface="Inter" pitchFamily="34" charset="0"/>
-                <a:ea typeface="Inter" pitchFamily="34" charset="-122"/>
-                <a:cs typeface="Inter" pitchFamily="34" charset="-120"/>
+                  <a:srgbClr val="575F5C"/>
+                </a:solidFill>
+                <a:latin typeface="Public Sans" pitchFamily="34" charset="0"/>
+                <a:ea typeface="Public Sans" pitchFamily="34" charset="-122"/>
+                <a:cs typeface="Public Sans" pitchFamily="34" charset="-120"/>
               </a:rPr>
               <a:t>Un prix qu'on ne peut pas contrôler soi-même est un prix qu'on subit.</a:t>
             </a:r>
@@ -3423,11 +3423,11 @@
             <a:r>
               <a:rPr lang="en-US" sz="1300" b="1" dirty="0">
                 <a:solidFill>
-                  <a:srgbClr val="0B0F19"/>
-                </a:solidFill>
-                <a:latin typeface="Inter" pitchFamily="34" charset="0"/>
-                <a:ea typeface="Inter" pitchFamily="34" charset="-122"/>
-                <a:cs typeface="Inter" pitchFamily="34" charset="-120"/>
+                  <a:srgbClr val="14181A"/>
+                </a:solidFill>
+                <a:latin typeface="Public Sans" pitchFamily="34" charset="0"/>
+                <a:ea typeface="Public Sans" pitchFamily="34" charset="-122"/>
+                <a:cs typeface="Public Sans" pitchFamily="34" charset="-120"/>
               </a:rPr>
               <a:t>Le nombre d'appareils qui comptent en même temps. </a:t>
             </a:r>
@@ -3443,11 +3443,11 @@
             <a:r>
               <a:rPr lang="en-US" sz="1300" dirty="0">
                 <a:solidFill>
-                  <a:srgbClr val="3D4556"/>
-                </a:solidFill>
-                <a:latin typeface="Inter" pitchFamily="34" charset="0"/>
-                <a:ea typeface="Inter" pitchFamily="34" charset="-122"/>
-                <a:cs typeface="Inter" pitchFamily="34" charset="-120"/>
+                  <a:srgbClr val="3A423F"/>
+                </a:solidFill>
+                <a:latin typeface="Public Sans" pitchFamily="34" charset="0"/>
+                <a:ea typeface="Public Sans" pitchFamily="34" charset="-122"/>
+                <a:cs typeface="Public Sans" pitchFamily="34" charset="-120"/>
               </a:rPr>
               <a:t>C'est votre organisation du jour de l'inventaire : deux personnes dans une boutique, trente dans un entrepôt. Vous le savez avant de signer, et vous le voyez le jour même.</a:t>
             </a:r>
@@ -3466,11 +3466,11 @@
             <a:r>
               <a:rPr lang="en-US" sz="1300" b="1" dirty="0">
                 <a:solidFill>
-                  <a:srgbClr val="0B0F19"/>
-                </a:solidFill>
-                <a:latin typeface="Inter" pitchFamily="34" charset="0"/>
-                <a:ea typeface="Inter" pitchFamily="34" charset="-122"/>
-                <a:cs typeface="Inter" pitchFamily="34" charset="-120"/>
+                  <a:srgbClr val="14181A"/>
+                </a:solidFill>
+                <a:latin typeface="Public Sans" pitchFamily="34" charset="0"/>
+                <a:ea typeface="Public Sans" pitchFamily="34" charset="-122"/>
+                <a:cs typeface="Public Sans" pitchFamily="34" charset="-120"/>
               </a:rPr>
               <a:t>Pas le volume de votre stock. </a:t>
             </a:r>
@@ -3486,11 +3486,11 @@
             <a:r>
               <a:rPr lang="en-US" sz="1300" dirty="0">
                 <a:solidFill>
-                  <a:srgbClr val="3D4556"/>
-                </a:solidFill>
-                <a:latin typeface="Inter" pitchFamily="34" charset="0"/>
-                <a:ea typeface="Inter" pitchFamily="34" charset="-122"/>
-                <a:cs typeface="Inter" pitchFamily="34" charset="-120"/>
+                  <a:srgbClr val="3A423F"/>
+                </a:solidFill>
+                <a:latin typeface="Public Sans" pitchFamily="34" charset="0"/>
+                <a:ea typeface="Public Sans" pitchFamily="34" charset="-122"/>
+                <a:cs typeface="Public Sans" pitchFamily="34" charset="-120"/>
               </a:rPr>
               <a:t>Le marché facture au nombre de pièces — le vôtre, que vous devez déclarer, que personne ne peut vérifier, et qu'il faut régulariser. Nous avons retiré cette assiette.</a:t>
             </a:r>
@@ -3509,11 +3509,11 @@
             <a:r>
               <a:rPr lang="en-US" sz="1300" b="1" dirty="0">
                 <a:solidFill>
-                  <a:srgbClr val="0B0F19"/>
-                </a:solidFill>
-                <a:latin typeface="Inter" pitchFamily="34" charset="0"/>
-                <a:ea typeface="Inter" pitchFamily="34" charset="-122"/>
-                <a:cs typeface="Inter" pitchFamily="34" charset="-120"/>
+                  <a:srgbClr val="14181A"/>
+                </a:solidFill>
+                <a:latin typeface="Public Sans" pitchFamily="34" charset="0"/>
+                <a:ea typeface="Public Sans" pitchFamily="34" charset="-122"/>
+                <a:cs typeface="Public Sans" pitchFamily="34" charset="-120"/>
               </a:rPr>
               <a:t>Pas le nombre de comptes. </a:t>
             </a:r>
@@ -3529,11 +3529,11 @@
             <a:r>
               <a:rPr lang="en-US" sz="1300" dirty="0">
                 <a:solidFill>
-                  <a:srgbClr val="3D4556"/>
-                </a:solidFill>
-                <a:latin typeface="Inter" pitchFamily="34" charset="0"/>
-                <a:ea typeface="Inter" pitchFamily="34" charset="-122"/>
-                <a:cs typeface="Inter" pitchFamily="34" charset="-120"/>
+                  <a:srgbClr val="3A423F"/>
+                </a:solidFill>
+                <a:latin typeface="Public Sans" pitchFamily="34" charset="0"/>
+                <a:ea typeface="Public Sans" pitchFamily="34" charset="-122"/>
+                <a:cs typeface="Public Sans" pitchFamily="34" charset="-120"/>
               </a:rPr>
               <a:t>Créez-en autant que nécessaire. Un saisonnier, un renfort du samedi, un chef d'équipe qui compte une fois par trimestre : seuls les appareils qui scannent en même temps entrent dans le palier.</a:t>
             </a:r>
@@ -3552,11 +3552,11 @@
             <a:r>
               <a:rPr lang="en-US" sz="1300" b="1" dirty="0">
                 <a:solidFill>
-                  <a:srgbClr val="0B0F19"/>
-                </a:solidFill>
-                <a:latin typeface="Inter" pitchFamily="34" charset="0"/>
-                <a:ea typeface="Inter" pitchFamily="34" charset="-122"/>
-                <a:cs typeface="Inter" pitchFamily="34" charset="-120"/>
+                  <a:srgbClr val="14181A"/>
+                </a:solidFill>
+                <a:latin typeface="Public Sans" pitchFamily="34" charset="0"/>
+                <a:ea typeface="Public Sans" pitchFamily="34" charset="-122"/>
+                <a:cs typeface="Public Sans" pitchFamily="34" charset="-120"/>
               </a:rPr>
               <a:t>Pas le nombre d'inventaires. </a:t>
             </a:r>
@@ -3572,11 +3572,11 @@
             <a:r>
               <a:rPr lang="en-US" sz="1300" dirty="0">
                 <a:solidFill>
-                  <a:srgbClr val="3D4556"/>
-                </a:solidFill>
-                <a:latin typeface="Inter" pitchFamily="34" charset="0"/>
-                <a:ea typeface="Inter" pitchFamily="34" charset="-122"/>
-                <a:cs typeface="Inter" pitchFamily="34" charset="-120"/>
+                  <a:srgbClr val="3A423F"/>
+                </a:solidFill>
+                <a:latin typeface="Public Sans" pitchFamily="34" charset="0"/>
+                <a:ea typeface="Public Sans" pitchFamily="34" charset="-122"/>
+                <a:cs typeface="Public Sans" pitchFamily="34" charset="-120"/>
               </a:rPr>
               <a:t>C'est le point qui compte pour un inventaire tournant : compter chaque semaine ne coûte pas un euro de plus que compter une fois par an.</a:t>
             </a:r>
@@ -3611,11 +3611,11 @@
             <a:r>
               <a:rPr lang="en-US" sz="900" dirty="0">
                 <a:solidFill>
-                  <a:srgbClr val="5B6475"/>
-                </a:solidFill>
-                <a:latin typeface="Inter" pitchFamily="34" charset="0"/>
-                <a:ea typeface="Inter" pitchFamily="34" charset="-122"/>
-                <a:cs typeface="Inter" pitchFamily="34" charset="-120"/>
+                  <a:srgbClr val="575F5C"/>
+                </a:solidFill>
+                <a:latin typeface="Public Sans" pitchFamily="34" charset="0"/>
+                <a:ea typeface="Public Sans" pitchFamily="34" charset="-122"/>
+                <a:cs typeface="Public Sans" pitchFamily="34" charset="-120"/>
               </a:rPr>
               <a:t>Quantinvo · tarification · août 2026</a:t>
             </a:r>
@@ -3650,11 +3650,11 @@
             <a:r>
               <a:rPr lang="en-US" sz="900" dirty="0">
                 <a:solidFill>
-                  <a:srgbClr val="5B6475"/>
-                </a:solidFill>
-                <a:latin typeface="Inter" pitchFamily="34" charset="0"/>
-                <a:ea typeface="Inter" pitchFamily="34" charset="-122"/>
-                <a:cs typeface="Inter" pitchFamily="34" charset="-120"/>
+                  <a:srgbClr val="575F5C"/>
+                </a:solidFill>
+                <a:latin typeface="Public Sans" pitchFamily="34" charset="0"/>
+                <a:ea typeface="Public Sans" pitchFamily="34" charset="-122"/>
+                <a:cs typeface="Public Sans" pitchFamily="34" charset="-120"/>
               </a:rPr>
               <a:t>2</a:t>
             </a:r>
@@ -3745,11 +3745,11 @@
             <a:r>
               <a:rPr lang="en-US" sz="1600" b="1" dirty="0">
                 <a:solidFill>
-                  <a:srgbClr val="0B0F19"/>
-                </a:solidFill>
-                <a:latin typeface="Sora" pitchFamily="34" charset="0"/>
-                <a:ea typeface="Sora" pitchFamily="34" charset="-122"/>
-                <a:cs typeface="Sora" pitchFamily="34" charset="-120"/>
+                  <a:srgbClr val="14181A"/>
+                </a:solidFill>
+                <a:latin typeface="Archivo" pitchFamily="34" charset="0"/>
+                <a:ea typeface="Archivo" pitchFamily="34" charset="-122"/>
+                <a:cs typeface="Archivo" pitchFamily="34" charset="-120"/>
               </a:rPr>
               <a:t>Quantinvo</a:t>
             </a:r>
@@ -3784,11 +3784,11 @@
             <a:r>
               <a:rPr lang="en-US" sz="1000" dirty="0">
                 <a:solidFill>
-                  <a:srgbClr val="5B6475"/>
-                </a:solidFill>
-                <a:latin typeface="Inter" pitchFamily="34" charset="0"/>
-                <a:ea typeface="Inter" pitchFamily="34" charset="-122"/>
-                <a:cs typeface="Inter" pitchFamily="34" charset="-120"/>
+                  <a:srgbClr val="575F5C"/>
+                </a:solidFill>
+                <a:latin typeface="Public Sans" pitchFamily="34" charset="0"/>
+                <a:ea typeface="Public Sans" pitchFamily="34" charset="-122"/>
+                <a:cs typeface="Public Sans" pitchFamily="34" charset="-120"/>
               </a:rPr>
               <a:t>La grille</a:t>
             </a:r>
@@ -3805,17 +3805,17 @@
         <p:spPr>
           <a:xfrm>
             <a:off x="731520" y="877824"/>
-            <a:ext cx="10725912" cy="25603"/>
+            <a:ext cx="10725912" cy="10973"/>
           </a:xfrm>
           <a:prstGeom prst="rect">
             <a:avLst/>
           </a:prstGeom>
           <a:solidFill>
-            <a:srgbClr val="38C9FF"/>
+            <a:srgbClr val="E2E5E1"/>
           </a:solidFill>
           <a:ln w="12700">
             <a:solidFill>
-              <a:srgbClr val="38C9FF"/>
+              <a:srgbClr val="E2E5E1"/>
             </a:solidFill>
             <a:prstDash val="solid"/>
           </a:ln>
@@ -3851,11 +3851,11 @@
             <a:r>
               <a:rPr lang="en-US" sz="2600" b="1" dirty="0">
                 <a:solidFill>
-                  <a:srgbClr val="4636B0"/>
-                </a:solidFill>
-                <a:latin typeface="Sora" pitchFamily="34" charset="0"/>
-                <a:ea typeface="Sora" pitchFamily="34" charset="-122"/>
-                <a:cs typeface="Sora" pitchFamily="34" charset="-120"/>
+                  <a:srgbClr val="14181A"/>
+                </a:solidFill>
+                <a:latin typeface="Archivo" pitchFamily="34" charset="0"/>
+                <a:ea typeface="Archivo" pitchFamily="34" charset="-122"/>
+                <a:cs typeface="Archivo" pitchFamily="34" charset="-120"/>
               </a:rPr>
               <a:t>Trois offres, une licence par magasin</a:t>
             </a:r>
@@ -3893,11 +3893,11 @@
             <a:r>
               <a:rPr lang="en-US" sz="1150" dirty="0">
                 <a:solidFill>
-                  <a:srgbClr val="5B6475"/>
-                </a:solidFill>
-                <a:latin typeface="Inter" pitchFamily="34" charset="0"/>
-                <a:ea typeface="Inter" pitchFamily="34" charset="-122"/>
-                <a:cs typeface="Inter" pitchFamily="34" charset="-120"/>
+                  <a:srgbClr val="575F5C"/>
+                </a:solidFill>
+                <a:latin typeface="Public Sans" pitchFamily="34" charset="0"/>
+                <a:ea typeface="Public Sans" pitchFamily="34" charset="-122"/>
+                <a:cs typeface="Public Sans" pitchFamily="34" charset="-120"/>
               </a:rPr>
               <a:t>Le prix est hors taxes, par magasin. Chaque magasin prend la sienne, choisie selon la taille de son équipe : un entrepôt qui compte à trente et une boutique qui compte à deux ne prennent pas la même.</a:t>
             </a:r>
@@ -3918,15 +3918,15 @@
           </a:xfrm>
           <a:prstGeom prst="roundRect">
             <a:avLst>
-              <a:gd name="adj" fmla="val 3223"/>
+              <a:gd name="adj" fmla="val 1074"/>
             </a:avLst>
           </a:prstGeom>
           <a:solidFill>
-            <a:srgbClr val="FFFFFF"/>
+            <a:srgbClr val="F2F3F1"/>
           </a:solidFill>
           <a:ln w="12700">
             <a:solidFill>
-              <a:srgbClr val="E3E6EE"/>
+              <a:srgbClr val="F2F3F1"/>
             </a:solidFill>
             <a:prstDash val="solid"/>
           </a:ln>
@@ -3959,11 +3959,11 @@
             <a:r>
               <a:rPr lang="en-US" sz="1800" b="1" dirty="0">
                 <a:solidFill>
-                  <a:srgbClr val="0B0F19"/>
-                </a:solidFill>
-                <a:latin typeface="Sora" pitchFamily="34" charset="0"/>
-                <a:ea typeface="Sora" pitchFamily="34" charset="-122"/>
-                <a:cs typeface="Sora" pitchFamily="34" charset="-120"/>
+                  <a:srgbClr val="14181A"/>
+                </a:solidFill>
+                <a:latin typeface="Archivo" pitchFamily="34" charset="0"/>
+                <a:ea typeface="Archivo" pitchFamily="34" charset="-122"/>
+                <a:cs typeface="Archivo" pitchFamily="34" charset="-120"/>
               </a:rPr>
               <a:t>Essential</a:t>
             </a:r>
@@ -3998,13 +3998,13 @@
             <a:r>
               <a:rPr lang="en-US" sz="1100" b="1" dirty="0">
                 <a:solidFill>
-                  <a:srgbClr val="6366F1"/>
-                </a:solidFill>
-                <a:latin typeface="Inter" pitchFamily="34" charset="0"/>
-                <a:ea typeface="Inter" pitchFamily="34" charset="-122"/>
-                <a:cs typeface="Inter" pitchFamily="34" charset="-120"/>
-              </a:rPr>
-              <a:t>2 appareils</a:t>
+                  <a:srgbClr val="1E4D3B"/>
+                </a:solidFill>
+                <a:latin typeface="Public Sans" pitchFamily="34" charset="0"/>
+                <a:ea typeface="Public Sans" pitchFamily="34" charset="-122"/>
+                <a:cs typeface="Public Sans" pitchFamily="34" charset="-120"/>
+              </a:rPr>
+              <a:t>Jusqu’à 2 appareils</a:t>
             </a:r>
             <a:endParaRPr lang="en-US" sz="1100" dirty="0"/>
           </a:p>
@@ -4040,11 +4040,11 @@
             <a:r>
               <a:rPr lang="en-US" sz="1000" dirty="0">
                 <a:solidFill>
-                  <a:srgbClr val="5B6475"/>
-                </a:solidFill>
-                <a:latin typeface="Inter" pitchFamily="34" charset="0"/>
-                <a:ea typeface="Inter" pitchFamily="34" charset="-122"/>
-                <a:cs typeface="Inter" pitchFamily="34" charset="-120"/>
+                  <a:srgbClr val="575F5C"/>
+                </a:solidFill>
+                <a:latin typeface="Public Sans" pitchFamily="34" charset="0"/>
+                <a:ea typeface="Public Sans" pitchFamily="34" charset="-122"/>
+                <a:cs typeface="Public Sans" pitchFamily="34" charset="-120"/>
               </a:rPr>
               <a:t>Vous comptez seul ou à deux, dans un magasin.</a:t>
             </a:r>
@@ -4079,11 +4079,11 @@
             <a:r>
               <a:rPr lang="en-US" sz="2600" b="1" dirty="0">
                 <a:solidFill>
-                  <a:srgbClr val="4636B0"/>
-                </a:solidFill>
-                <a:latin typeface="Sora" pitchFamily="34" charset="0"/>
-                <a:ea typeface="Sora" pitchFamily="34" charset="-122"/>
-                <a:cs typeface="Sora" pitchFamily="34" charset="-120"/>
+                  <a:srgbClr val="14181A"/>
+                </a:solidFill>
+                <a:latin typeface="Archivo" pitchFamily="34" charset="0"/>
+                <a:ea typeface="Archivo" pitchFamily="34" charset="-122"/>
+                <a:cs typeface="Archivo" pitchFamily="34" charset="-120"/>
               </a:rPr>
               <a:t>89 €</a:t>
             </a:r>
@@ -4093,11 +4093,11 @@
             <a:r>
               <a:rPr lang="en-US" sz="1050" dirty="0">
                 <a:solidFill>
-                  <a:srgbClr val="5B6475"/>
-                </a:solidFill>
-                <a:latin typeface="Inter" pitchFamily="34" charset="0"/>
-                <a:ea typeface="Inter" pitchFamily="34" charset="-122"/>
-                <a:cs typeface="Inter" pitchFamily="34" charset="-120"/>
+                  <a:srgbClr val="575F5C"/>
+                </a:solidFill>
+                <a:latin typeface="Public Sans" pitchFamily="34" charset="0"/>
+                <a:ea typeface="Public Sans" pitchFamily="34" charset="-122"/>
+                <a:cs typeface="Public Sans" pitchFamily="34" charset="-120"/>
               </a:rPr>
               <a:t>  HT / mois</a:t>
             </a:r>
@@ -4132,11 +4132,11 @@
             <a:r>
               <a:rPr lang="en-US" sz="950" dirty="0">
                 <a:solidFill>
-                  <a:srgbClr val="1F7A5C"/>
-                </a:solidFill>
-                <a:latin typeface="Inter" pitchFamily="34" charset="0"/>
-                <a:ea typeface="Inter" pitchFamily="34" charset="-122"/>
-                <a:cs typeface="Inter" pitchFamily="34" charset="-120"/>
+                  <a:srgbClr val="15704F"/>
+                </a:solidFill>
+                <a:latin typeface="Public Sans" pitchFamily="34" charset="0"/>
+                <a:ea typeface="Public Sans" pitchFamily="34" charset="-122"/>
+                <a:cs typeface="Public Sans" pitchFamily="34" charset="-120"/>
               </a:rPr>
               <a:t>ou 950 € à l’année — 118 € de moins</a:t>
             </a:r>
@@ -4161,7 +4161,7 @@
           <a:noFill/>
           <a:ln w="9525">
             <a:solidFill>
-              <a:srgbClr val="E3E6EE"/>
+              <a:srgbClr val="E2E5E1"/>
             </a:solidFill>
             <a:prstDash val="solid"/>
           </a:ln>
@@ -4201,13 +4201,13 @@
             <a:r>
               <a:rPr lang="en-US" sz="950" dirty="0">
                 <a:solidFill>
-                  <a:srgbClr val="3D4556"/>
-                </a:solidFill>
-                <a:latin typeface="Inter" pitchFamily="34" charset="0"/>
-                <a:ea typeface="Inter" pitchFamily="34" charset="-122"/>
-                <a:cs typeface="Inter" pitchFamily="34" charset="-120"/>
-              </a:rPr>
-              <a:t>Un magasin, deux comptes</a:t>
+                  <a:srgbClr val="3A423F"/>
+                </a:solidFill>
+                <a:latin typeface="Public Sans" pitchFamily="34" charset="0"/>
+                <a:ea typeface="Public Sans" pitchFamily="34" charset="-122"/>
+                <a:cs typeface="Public Sans" pitchFamily="34" charset="-120"/>
+              </a:rPr>
+              <a:t>Un magasin, deux appareils à la fois — comptes illimités</a:t>
             </a:r>
             <a:endParaRPr lang="en-US" sz="950" dirty="0"/>
           </a:p>
@@ -4225,11 +4225,11 @@
             <a:r>
               <a:rPr lang="en-US" sz="950" dirty="0">
                 <a:solidFill>
-                  <a:srgbClr val="3D4556"/>
-                </a:solidFill>
-                <a:latin typeface="Inter" pitchFamily="34" charset="0"/>
-                <a:ea typeface="Inter" pitchFamily="34" charset="-122"/>
-                <a:cs typeface="Inter" pitchFamily="34" charset="-120"/>
+                  <a:srgbClr val="3A423F"/>
+                </a:solidFill>
+                <a:latin typeface="Public Sans" pitchFamily="34" charset="0"/>
+                <a:ea typeface="Public Sans" pitchFamily="34" charset="-122"/>
+                <a:cs typeface="Public Sans" pitchFamily="34" charset="-120"/>
               </a:rPr>
               <a:t>Comptage et audit en seconde passe</a:t>
             </a:r>
@@ -4249,11 +4249,11 @@
             <a:r>
               <a:rPr lang="en-US" sz="950" dirty="0">
                 <a:solidFill>
-                  <a:srgbClr val="3D4556"/>
-                </a:solidFill>
-                <a:latin typeface="Inter" pitchFamily="34" charset="0"/>
-                <a:ea typeface="Inter" pitchFamily="34" charset="-122"/>
-                <a:cs typeface="Inter" pitchFamily="34" charset="-120"/>
+                  <a:srgbClr val="3A423F"/>
+                </a:solidFill>
+                <a:latin typeface="Public Sans" pitchFamily="34" charset="0"/>
+                <a:ea typeface="Public Sans" pitchFamily="34" charset="-122"/>
+                <a:cs typeface="Public Sans" pitchFamily="34" charset="-120"/>
               </a:rPr>
               <a:t>Rapport d’écarts et export Excel</a:t>
             </a:r>
@@ -4273,11 +4273,11 @@
             <a:r>
               <a:rPr lang="en-US" sz="950" dirty="0">
                 <a:solidFill>
-                  <a:srgbClr val="3D4556"/>
-                </a:solidFill>
-                <a:latin typeface="Inter" pitchFamily="34" charset="0"/>
-                <a:ea typeface="Inter" pitchFamily="34" charset="-122"/>
-                <a:cs typeface="Inter" pitchFamily="34" charset="-120"/>
+                  <a:srgbClr val="3A423F"/>
+                </a:solidFill>
+                <a:latin typeface="Public Sans" pitchFamily="34" charset="0"/>
+                <a:ea typeface="Public Sans" pitchFamily="34" charset="-122"/>
+                <a:cs typeface="Public Sans" pitchFamily="34" charset="-120"/>
               </a:rPr>
               <a:t>Import CSV et Excel sans reformater</a:t>
             </a:r>
@@ -4297,11 +4297,11 @@
             <a:r>
               <a:rPr lang="en-US" sz="950" dirty="0">
                 <a:solidFill>
-                  <a:srgbClr val="3D4556"/>
-                </a:solidFill>
-                <a:latin typeface="Inter" pitchFamily="34" charset="0"/>
-                <a:ea typeface="Inter" pitchFamily="34" charset="-122"/>
-                <a:cs typeface="Inter" pitchFamily="34" charset="-120"/>
+                  <a:srgbClr val="3A423F"/>
+                </a:solidFill>
+                <a:latin typeface="Public Sans" pitchFamily="34" charset="0"/>
+                <a:ea typeface="Public Sans" pitchFamily="34" charset="-122"/>
+                <a:cs typeface="Public Sans" pitchFamily="34" charset="-120"/>
               </a:rPr>
               <a:t>Aide en ligne</a:t>
             </a:r>
@@ -4322,15 +4322,15 @@
           </a:xfrm>
           <a:prstGeom prst="roundRect">
             <a:avLst>
-              <a:gd name="adj" fmla="val 3223"/>
+              <a:gd name="adj" fmla="val 1074"/>
             </a:avLst>
           </a:prstGeom>
           <a:solidFill>
-            <a:srgbClr val="EEEEFC"/>
+            <a:srgbClr val="E7EDE9"/>
           </a:solidFill>
-          <a:ln w="19050">
+          <a:ln w="15875">
             <a:solidFill>
-              <a:srgbClr val="6366F1"/>
+              <a:srgbClr val="1E4D3B"/>
             </a:solidFill>
             <a:prstDash val="solid"/>
           </a:ln>
@@ -4363,11 +4363,11 @@
             <a:r>
               <a:rPr lang="en-US" sz="800" b="1" spc="60" kern="0" dirty="0">
                 <a:solidFill>
-                  <a:srgbClr val="6366F1"/>
-                </a:solidFill>
-                <a:latin typeface="Inter" pitchFamily="34" charset="0"/>
-                <a:ea typeface="Inter" pitchFamily="34" charset="-122"/>
-                <a:cs typeface="Inter" pitchFamily="34" charset="-120"/>
+                  <a:srgbClr val="1E4D3B"/>
+                </a:solidFill>
+                <a:latin typeface="Public Sans" pitchFamily="34" charset="0"/>
+                <a:ea typeface="Public Sans" pitchFamily="34" charset="-122"/>
+                <a:cs typeface="Public Sans" pitchFamily="34" charset="-120"/>
               </a:rPr>
               <a:t>LE PLUS COURANT</a:t>
             </a:r>
@@ -4402,11 +4402,11 @@
             <a:r>
               <a:rPr lang="en-US" sz="1800" b="1" dirty="0">
                 <a:solidFill>
-                  <a:srgbClr val="0B0F19"/>
-                </a:solidFill>
-                <a:latin typeface="Sora" pitchFamily="34" charset="0"/>
-                <a:ea typeface="Sora" pitchFamily="34" charset="-122"/>
-                <a:cs typeface="Sora" pitchFamily="34" charset="-120"/>
+                  <a:srgbClr val="14181A"/>
+                </a:solidFill>
+                <a:latin typeface="Archivo" pitchFamily="34" charset="0"/>
+                <a:ea typeface="Archivo" pitchFamily="34" charset="-122"/>
+                <a:cs typeface="Archivo" pitchFamily="34" charset="-120"/>
               </a:rPr>
               <a:t>Advanced</a:t>
             </a:r>
@@ -4441,13 +4441,13 @@
             <a:r>
               <a:rPr lang="en-US" sz="1100" b="1" dirty="0">
                 <a:solidFill>
-                  <a:srgbClr val="6366F1"/>
-                </a:solidFill>
-                <a:latin typeface="Inter" pitchFamily="34" charset="0"/>
-                <a:ea typeface="Inter" pitchFamily="34" charset="-122"/>
-                <a:cs typeface="Inter" pitchFamily="34" charset="-120"/>
-              </a:rPr>
-              <a:t>3 à 20 appareils</a:t>
+                  <a:srgbClr val="1E4D3B"/>
+                </a:solidFill>
+                <a:latin typeface="Public Sans" pitchFamily="34" charset="0"/>
+                <a:ea typeface="Public Sans" pitchFamily="34" charset="-122"/>
+                <a:cs typeface="Public Sans" pitchFamily="34" charset="-120"/>
+              </a:rPr>
+              <a:t>Jusqu’à 20 appareils</a:t>
             </a:r>
             <a:endParaRPr lang="en-US" sz="1100" dirty="0"/>
           </a:p>
@@ -4483,11 +4483,11 @@
             <a:r>
               <a:rPr lang="en-US" sz="1000" dirty="0">
                 <a:solidFill>
-                  <a:srgbClr val="5B6475"/>
-                </a:solidFill>
-                <a:latin typeface="Inter" pitchFamily="34" charset="0"/>
-                <a:ea typeface="Inter" pitchFamily="34" charset="-122"/>
-                <a:cs typeface="Inter" pitchFamily="34" charset="-120"/>
+                  <a:srgbClr val="575F5C"/>
+                </a:solidFill>
+                <a:latin typeface="Public Sans" pitchFamily="34" charset="0"/>
+                <a:ea typeface="Public Sans" pitchFamily="34" charset="-122"/>
+                <a:cs typeface="Public Sans" pitchFamily="34" charset="-120"/>
               </a:rPr>
               <a:t>Vous montez une équipe le jour de l’inventaire.</a:t>
             </a:r>
@@ -4522,11 +4522,11 @@
             <a:r>
               <a:rPr lang="en-US" sz="2600" b="1" dirty="0">
                 <a:solidFill>
-                  <a:srgbClr val="4636B0"/>
-                </a:solidFill>
-                <a:latin typeface="Sora" pitchFamily="34" charset="0"/>
-                <a:ea typeface="Sora" pitchFamily="34" charset="-122"/>
-                <a:cs typeface="Sora" pitchFamily="34" charset="-120"/>
+                  <a:srgbClr val="14181A"/>
+                </a:solidFill>
+                <a:latin typeface="Archivo" pitchFamily="34" charset="0"/>
+                <a:ea typeface="Archivo" pitchFamily="34" charset="-122"/>
+                <a:cs typeface="Archivo" pitchFamily="34" charset="-120"/>
               </a:rPr>
               <a:t>310 €</a:t>
             </a:r>
@@ -4536,11 +4536,11 @@
             <a:r>
               <a:rPr lang="en-US" sz="1050" dirty="0">
                 <a:solidFill>
-                  <a:srgbClr val="5B6475"/>
-                </a:solidFill>
-                <a:latin typeface="Inter" pitchFamily="34" charset="0"/>
-                <a:ea typeface="Inter" pitchFamily="34" charset="-122"/>
-                <a:cs typeface="Inter" pitchFamily="34" charset="-120"/>
+                  <a:srgbClr val="575F5C"/>
+                </a:solidFill>
+                <a:latin typeface="Public Sans" pitchFamily="34" charset="0"/>
+                <a:ea typeface="Public Sans" pitchFamily="34" charset="-122"/>
+                <a:cs typeface="Public Sans" pitchFamily="34" charset="-120"/>
               </a:rPr>
               <a:t>  HT / mois</a:t>
             </a:r>
@@ -4575,11 +4575,11 @@
             <a:r>
               <a:rPr lang="en-US" sz="950" dirty="0">
                 <a:solidFill>
-                  <a:srgbClr val="1F7A5C"/>
-                </a:solidFill>
-                <a:latin typeface="Inter" pitchFamily="34" charset="0"/>
-                <a:ea typeface="Inter" pitchFamily="34" charset="-122"/>
-                <a:cs typeface="Inter" pitchFamily="34" charset="-120"/>
+                  <a:srgbClr val="15704F"/>
+                </a:solidFill>
+                <a:latin typeface="Public Sans" pitchFamily="34" charset="0"/>
+                <a:ea typeface="Public Sans" pitchFamily="34" charset="-122"/>
+                <a:cs typeface="Public Sans" pitchFamily="34" charset="-120"/>
               </a:rPr>
               <a:t>ou 3 300 € à l’année — 420 € de moins</a:t>
             </a:r>
@@ -4604,7 +4604,7 @@
           <a:noFill/>
           <a:ln w="9525">
             <a:solidFill>
-              <a:srgbClr val="E3E6EE"/>
+              <a:srgbClr val="E2E5E1"/>
             </a:solidFill>
             <a:prstDash val="solid"/>
           </a:ln>
@@ -4644,11 +4644,11 @@
             <a:r>
               <a:rPr lang="en-US" sz="950" dirty="0">
                 <a:solidFill>
-                  <a:srgbClr val="3D4556"/>
-                </a:solidFill>
-                <a:latin typeface="Inter" pitchFamily="34" charset="0"/>
-                <a:ea typeface="Inter" pitchFamily="34" charset="-122"/>
-                <a:cs typeface="Inter" pitchFamily="34" charset="-120"/>
+                  <a:srgbClr val="3A423F"/>
+                </a:solidFill>
+                <a:latin typeface="Public Sans" pitchFamily="34" charset="0"/>
+                <a:ea typeface="Public Sans" pitchFamily="34" charset="-122"/>
+                <a:cs typeface="Public Sans" pitchFamily="34" charset="-120"/>
               </a:rPr>
               <a:t>Tout ce que contient Essential</a:t>
             </a:r>
@@ -4668,11 +4668,11 @@
             <a:r>
               <a:rPr lang="en-US" sz="950" dirty="0">
                 <a:solidFill>
-                  <a:srgbClr val="3D4556"/>
-                </a:solidFill>
-                <a:latin typeface="Inter" pitchFamily="34" charset="0"/>
-                <a:ea typeface="Inter" pitchFamily="34" charset="-122"/>
-                <a:cs typeface="Inter" pitchFamily="34" charset="-120"/>
+                  <a:srgbClr val="3A423F"/>
+                </a:solidFill>
+                <a:latin typeface="Public Sans" pitchFamily="34" charset="0"/>
+                <a:ea typeface="Public Sans" pitchFamily="34" charset="-122"/>
+                <a:cs typeface="Public Sans" pitchFamily="34" charset="-120"/>
               </a:rPr>
               <a:t>Équipe, rôles et supervision</a:t>
             </a:r>
@@ -4692,11 +4692,11 @@
             <a:r>
               <a:rPr lang="en-US" sz="950" dirty="0">
                 <a:solidFill>
-                  <a:srgbClr val="3D4556"/>
-                </a:solidFill>
-                <a:latin typeface="Inter" pitchFamily="34" charset="0"/>
-                <a:ea typeface="Inter" pitchFamily="34" charset="-122"/>
-                <a:cs typeface="Inter" pitchFamily="34" charset="-120"/>
+                  <a:srgbClr val="3A423F"/>
+                </a:solidFill>
+                <a:latin typeface="Public Sans" pitchFamily="34" charset="0"/>
+                <a:ea typeface="Public Sans" pitchFamily="34" charset="-122"/>
+                <a:cs typeface="Public Sans" pitchFamily="34" charset="-120"/>
               </a:rPr>
               <a:t>Balises imprimées et zones de comptage</a:t>
             </a:r>
@@ -4716,11 +4716,11 @@
             <a:r>
               <a:rPr lang="en-US" sz="950" dirty="0">
                 <a:solidFill>
-                  <a:srgbClr val="3D4556"/>
-                </a:solidFill>
-                <a:latin typeface="Inter" pitchFamily="34" charset="0"/>
-                <a:ea typeface="Inter" pitchFamily="34" charset="-122"/>
-                <a:cs typeface="Inter" pitchFamily="34" charset="-120"/>
+                  <a:srgbClr val="3A423F"/>
+                </a:solidFill>
+                <a:latin typeface="Public Sans" pitchFamily="34" charset="0"/>
+                <a:ea typeface="Public Sans" pitchFamily="34" charset="-122"/>
+                <a:cs typeface="Public Sans" pitchFamily="34" charset="-120"/>
               </a:rPr>
               <a:t>Suivi de l’avancement en direct</a:t>
             </a:r>
@@ -4740,11 +4740,11 @@
             <a:r>
               <a:rPr lang="en-US" sz="950" dirty="0">
                 <a:solidFill>
-                  <a:srgbClr val="3D4556"/>
-                </a:solidFill>
-                <a:latin typeface="Inter" pitchFamily="34" charset="0"/>
-                <a:ea typeface="Inter" pitchFamily="34" charset="-122"/>
-                <a:cs typeface="Inter" pitchFamily="34" charset="-120"/>
+                  <a:srgbClr val="3A423F"/>
+                </a:solidFill>
+                <a:latin typeface="Public Sans" pitchFamily="34" charset="0"/>
+                <a:ea typeface="Public Sans" pitchFamily="34" charset="-122"/>
+                <a:cs typeface="Public Sans" pitchFamily="34" charset="-120"/>
               </a:rPr>
               <a:t>Réponse par e-mail sous un jour ouvré</a:t>
             </a:r>
@@ -4765,15 +4765,15 @@
           </a:xfrm>
           <a:prstGeom prst="roundRect">
             <a:avLst>
-              <a:gd name="adj" fmla="val 3223"/>
+              <a:gd name="adj" fmla="val 1074"/>
             </a:avLst>
           </a:prstGeom>
           <a:solidFill>
-            <a:srgbClr val="FFFFFF"/>
+            <a:srgbClr val="F2F3F1"/>
           </a:solidFill>
           <a:ln w="12700">
             <a:solidFill>
-              <a:srgbClr val="E3E6EE"/>
+              <a:srgbClr val="F2F3F1"/>
             </a:solidFill>
             <a:prstDash val="solid"/>
           </a:ln>
@@ -4806,11 +4806,11 @@
             <a:r>
               <a:rPr lang="en-US" sz="1800" b="1" dirty="0">
                 <a:solidFill>
-                  <a:srgbClr val="0B0F19"/>
-                </a:solidFill>
-                <a:latin typeface="Sora" pitchFamily="34" charset="0"/>
-                <a:ea typeface="Sora" pitchFamily="34" charset="-122"/>
-                <a:cs typeface="Sora" pitchFamily="34" charset="-120"/>
+                  <a:srgbClr val="14181A"/>
+                </a:solidFill>
+                <a:latin typeface="Archivo" pitchFamily="34" charset="0"/>
+                <a:ea typeface="Archivo" pitchFamily="34" charset="-122"/>
+                <a:cs typeface="Archivo" pitchFamily="34" charset="-120"/>
               </a:rPr>
               <a:t>Enterprise</a:t>
             </a:r>
@@ -4845,13 +4845,13 @@
             <a:r>
               <a:rPr lang="en-US" sz="1100" b="1" dirty="0">
                 <a:solidFill>
-                  <a:srgbClr val="6366F1"/>
-                </a:solidFill>
-                <a:latin typeface="Inter" pitchFamily="34" charset="0"/>
-                <a:ea typeface="Inter" pitchFamily="34" charset="-122"/>
-                <a:cs typeface="Inter" pitchFamily="34" charset="-120"/>
-              </a:rPr>
-              <a:t>21 à 100 appareils</a:t>
+                  <a:srgbClr val="1E4D3B"/>
+                </a:solidFill>
+                <a:latin typeface="Public Sans" pitchFamily="34" charset="0"/>
+                <a:ea typeface="Public Sans" pitchFamily="34" charset="-122"/>
+                <a:cs typeface="Public Sans" pitchFamily="34" charset="-120"/>
+              </a:rPr>
+              <a:t>Jusqu’à 100 appareils</a:t>
             </a:r>
             <a:endParaRPr lang="en-US" sz="1100" dirty="0"/>
           </a:p>
@@ -4887,11 +4887,11 @@
             <a:r>
               <a:rPr lang="en-US" sz="1000" dirty="0">
                 <a:solidFill>
-                  <a:srgbClr val="5B6475"/>
-                </a:solidFill>
-                <a:latin typeface="Inter" pitchFamily="34" charset="0"/>
-                <a:ea typeface="Inter" pitchFamily="34" charset="-122"/>
-                <a:cs typeface="Inter" pitchFamily="34" charset="-120"/>
+                  <a:srgbClr val="575F5C"/>
+                </a:solidFill>
+                <a:latin typeface="Public Sans" pitchFamily="34" charset="0"/>
+                <a:ea typeface="Public Sans" pitchFamily="34" charset="-122"/>
+                <a:cs typeface="Public Sans" pitchFamily="34" charset="-120"/>
               </a:rPr>
               <a:t>La grande surface, qui mobilise une équipe entière.</a:t>
             </a:r>
@@ -4926,11 +4926,11 @@
             <a:r>
               <a:rPr lang="en-US" sz="2600" b="1" dirty="0">
                 <a:solidFill>
-                  <a:srgbClr val="4636B0"/>
-                </a:solidFill>
-                <a:latin typeface="Sora" pitchFamily="34" charset="0"/>
-                <a:ea typeface="Sora" pitchFamily="34" charset="-122"/>
-                <a:cs typeface="Sora" pitchFamily="34" charset="-120"/>
+                  <a:srgbClr val="14181A"/>
+                </a:solidFill>
+                <a:latin typeface="Archivo" pitchFamily="34" charset="0"/>
+                <a:ea typeface="Archivo" pitchFamily="34" charset="-122"/>
+                <a:cs typeface="Archivo" pitchFamily="34" charset="-120"/>
               </a:rPr>
               <a:t>890 €</a:t>
             </a:r>
@@ -4940,11 +4940,11 @@
             <a:r>
               <a:rPr lang="en-US" sz="1050" dirty="0">
                 <a:solidFill>
-                  <a:srgbClr val="5B6475"/>
-                </a:solidFill>
-                <a:latin typeface="Inter" pitchFamily="34" charset="0"/>
-                <a:ea typeface="Inter" pitchFamily="34" charset="-122"/>
-                <a:cs typeface="Inter" pitchFamily="34" charset="-120"/>
+                  <a:srgbClr val="575F5C"/>
+                </a:solidFill>
+                <a:latin typeface="Public Sans" pitchFamily="34" charset="0"/>
+                <a:ea typeface="Public Sans" pitchFamily="34" charset="-122"/>
+                <a:cs typeface="Public Sans" pitchFamily="34" charset="-120"/>
               </a:rPr>
               <a:t>  HT / mois</a:t>
             </a:r>
@@ -4979,11 +4979,11 @@
             <a:r>
               <a:rPr lang="en-US" sz="950" dirty="0">
                 <a:solidFill>
-                  <a:srgbClr val="1F7A5C"/>
-                </a:solidFill>
-                <a:latin typeface="Inter" pitchFamily="34" charset="0"/>
-                <a:ea typeface="Inter" pitchFamily="34" charset="-122"/>
-                <a:cs typeface="Inter" pitchFamily="34" charset="-120"/>
+                  <a:srgbClr val="15704F"/>
+                </a:solidFill>
+                <a:latin typeface="Public Sans" pitchFamily="34" charset="0"/>
+                <a:ea typeface="Public Sans" pitchFamily="34" charset="-122"/>
+                <a:cs typeface="Public Sans" pitchFamily="34" charset="-120"/>
               </a:rPr>
               <a:t>ou 9 450 € à l’année — 1 230 € de moins</a:t>
             </a:r>
@@ -5008,7 +5008,7 @@
           <a:noFill/>
           <a:ln w="9525">
             <a:solidFill>
-              <a:srgbClr val="E3E6EE"/>
+              <a:srgbClr val="E2E5E1"/>
             </a:solidFill>
             <a:prstDash val="solid"/>
           </a:ln>
@@ -5048,11 +5048,11 @@
             <a:r>
               <a:rPr lang="en-US" sz="950" dirty="0">
                 <a:solidFill>
-                  <a:srgbClr val="3D4556"/>
-                </a:solidFill>
-                <a:latin typeface="Inter" pitchFamily="34" charset="0"/>
-                <a:ea typeface="Inter" pitchFamily="34" charset="-122"/>
-                <a:cs typeface="Inter" pitchFamily="34" charset="-120"/>
+                  <a:srgbClr val="3A423F"/>
+                </a:solidFill>
+                <a:latin typeface="Public Sans" pitchFamily="34" charset="0"/>
+                <a:ea typeface="Public Sans" pitchFamily="34" charset="-122"/>
+                <a:cs typeface="Public Sans" pitchFamily="34" charset="-120"/>
               </a:rPr>
               <a:t>Tout ce que contient Advanced</a:t>
             </a:r>
@@ -5072,11 +5072,11 @@
             <a:r>
               <a:rPr lang="en-US" sz="950" dirty="0">
                 <a:solidFill>
-                  <a:srgbClr val="3D4556"/>
-                </a:solidFill>
-                <a:latin typeface="Inter" pitchFamily="34" charset="0"/>
-                <a:ea typeface="Inter" pitchFamily="34" charset="-122"/>
-                <a:cs typeface="Inter" pitchFamily="34" charset="-120"/>
+                  <a:srgbClr val="3A423F"/>
+                </a:solidFill>
+                <a:latin typeface="Public Sans" pitchFamily="34" charset="0"/>
+                <a:ea typeface="Public Sans" pitchFamily="34" charset="-122"/>
+                <a:cs typeface="Public Sans" pitchFamily="34" charset="-120"/>
               </a:rPr>
               <a:t>Console d’entreprise et journal des actions</a:t>
             </a:r>
@@ -5096,11 +5096,11 @@
             <a:r>
               <a:rPr lang="en-US" sz="950" dirty="0">
                 <a:solidFill>
-                  <a:srgbClr val="3D4556"/>
-                </a:solidFill>
-                <a:latin typeface="Inter" pitchFamily="34" charset="0"/>
-                <a:ea typeface="Inter" pitchFamily="34" charset="-122"/>
-                <a:cs typeface="Inter" pitchFamily="34" charset="-120"/>
+                  <a:srgbClr val="3A423F"/>
+                </a:solidFill>
+                <a:latin typeface="Public Sans" pitchFamily="34" charset="0"/>
+                <a:ea typeface="Public Sans" pitchFamily="34" charset="-122"/>
+                <a:cs typeface="Public Sans" pitchFamily="34" charset="-120"/>
               </a:rPr>
               <a:t>Accompagnement du premier inventaire</a:t>
             </a:r>
@@ -5120,11 +5120,11 @@
             <a:r>
               <a:rPr lang="en-US" sz="950" dirty="0">
                 <a:solidFill>
-                  <a:srgbClr val="3D4556"/>
-                </a:solidFill>
-                <a:latin typeface="Inter" pitchFamily="34" charset="0"/>
-                <a:ea typeface="Inter" pitchFamily="34" charset="-122"/>
-                <a:cs typeface="Inter" pitchFamily="34" charset="-120"/>
+                  <a:srgbClr val="3A423F"/>
+                </a:solidFill>
+                <a:latin typeface="Public Sans" pitchFamily="34" charset="0"/>
+                <a:ea typeface="Public Sans" pitchFamily="34" charset="-122"/>
+                <a:cs typeface="Public Sans" pitchFamily="34" charset="-120"/>
               </a:rPr>
               <a:t>Engagement de disponibilité</a:t>
             </a:r>
@@ -5144,11 +5144,11 @@
             <a:r>
               <a:rPr lang="en-US" sz="950" dirty="0">
                 <a:solidFill>
-                  <a:srgbClr val="3D4556"/>
-                </a:solidFill>
-                <a:latin typeface="Inter" pitchFamily="34" charset="0"/>
-                <a:ea typeface="Inter" pitchFamily="34" charset="-122"/>
-                <a:cs typeface="Inter" pitchFamily="34" charset="-120"/>
+                  <a:srgbClr val="3A423F"/>
+                </a:solidFill>
+                <a:latin typeface="Public Sans" pitchFamily="34" charset="0"/>
+                <a:ea typeface="Public Sans" pitchFamily="34" charset="-122"/>
+                <a:cs typeface="Public Sans" pitchFamily="34" charset="-120"/>
               </a:rPr>
               <a:t>Interlocuteur nommé</a:t>
             </a:r>
@@ -5186,11 +5186,11 @@
             <a:r>
               <a:rPr lang="en-US" sz="1100" i="1" dirty="0">
                 <a:solidFill>
-                  <a:srgbClr val="5B6475"/>
-                </a:solidFill>
-                <a:latin typeface="Inter" pitchFamily="34" charset="0"/>
-                <a:ea typeface="Inter" pitchFamily="34" charset="-122"/>
-                <a:cs typeface="Inter" pitchFamily="34" charset="-120"/>
+                  <a:srgbClr val="575F5C"/>
+                </a:solidFill>
+                <a:latin typeface="Public Sans" pitchFamily="34" charset="0"/>
+                <a:ea typeface="Public Sans" pitchFamily="34" charset="-122"/>
+                <a:cs typeface="Public Sans" pitchFamily="34" charset="-120"/>
               </a:rPr>
               <a:t>Plus de 100 appareils dans un même magasin ? 64 € par mois, ou 690 € à l’année, par tranche de 10 appareils supplémentaires.</a:t>
             </a:r>
@@ -5225,11 +5225,11 @@
             <a:r>
               <a:rPr lang="en-US" sz="900" dirty="0">
                 <a:solidFill>
-                  <a:srgbClr val="5B6475"/>
-                </a:solidFill>
-                <a:latin typeface="Inter" pitchFamily="34" charset="0"/>
-                <a:ea typeface="Inter" pitchFamily="34" charset="-122"/>
-                <a:cs typeface="Inter" pitchFamily="34" charset="-120"/>
+                  <a:srgbClr val="575F5C"/>
+                </a:solidFill>
+                <a:latin typeface="Public Sans" pitchFamily="34" charset="0"/>
+                <a:ea typeface="Public Sans" pitchFamily="34" charset="-122"/>
+                <a:cs typeface="Public Sans" pitchFamily="34" charset="-120"/>
               </a:rPr>
               <a:t>Quantinvo · tarification · août 2026</a:t>
             </a:r>
@@ -5264,11 +5264,11 @@
             <a:r>
               <a:rPr lang="en-US" sz="900" dirty="0">
                 <a:solidFill>
-                  <a:srgbClr val="5B6475"/>
-                </a:solidFill>
-                <a:latin typeface="Inter" pitchFamily="34" charset="0"/>
-                <a:ea typeface="Inter" pitchFamily="34" charset="-122"/>
-                <a:cs typeface="Inter" pitchFamily="34" charset="-120"/>
+                  <a:srgbClr val="575F5C"/>
+                </a:solidFill>
+                <a:latin typeface="Public Sans" pitchFamily="34" charset="0"/>
+                <a:ea typeface="Public Sans" pitchFamily="34" charset="-122"/>
+                <a:cs typeface="Public Sans" pitchFamily="34" charset="-120"/>
               </a:rPr>
               <a:t>3</a:t>
             </a:r>
@@ -5359,11 +5359,11 @@
             <a:r>
               <a:rPr lang="en-US" sz="1600" b="1" dirty="0">
                 <a:solidFill>
-                  <a:srgbClr val="0B0F19"/>
-                </a:solidFill>
-                <a:latin typeface="Sora" pitchFamily="34" charset="0"/>
-                <a:ea typeface="Sora" pitchFamily="34" charset="-122"/>
-                <a:cs typeface="Sora" pitchFamily="34" charset="-120"/>
+                  <a:srgbClr val="14181A"/>
+                </a:solidFill>
+                <a:latin typeface="Archivo" pitchFamily="34" charset="0"/>
+                <a:ea typeface="Archivo" pitchFamily="34" charset="-122"/>
+                <a:cs typeface="Archivo" pitchFamily="34" charset="-120"/>
               </a:rPr>
               <a:t>Quantinvo</a:t>
             </a:r>
@@ -5398,11 +5398,11 @@
             <a:r>
               <a:rPr lang="en-US" sz="1000" dirty="0">
                 <a:solidFill>
-                  <a:srgbClr val="5B6475"/>
-                </a:solidFill>
-                <a:latin typeface="Inter" pitchFamily="34" charset="0"/>
-                <a:ea typeface="Inter" pitchFamily="34" charset="-122"/>
-                <a:cs typeface="Inter" pitchFamily="34" charset="-120"/>
+                  <a:srgbClr val="575F5C"/>
+                </a:solidFill>
+                <a:latin typeface="Public Sans" pitchFamily="34" charset="0"/>
+                <a:ea typeface="Public Sans" pitchFamily="34" charset="-122"/>
+                <a:cs typeface="Public Sans" pitchFamily="34" charset="-120"/>
               </a:rPr>
               <a:t>Le prix est public</a:t>
             </a:r>
@@ -5419,17 +5419,17 @@
         <p:spPr>
           <a:xfrm>
             <a:off x="731520" y="877824"/>
-            <a:ext cx="10725912" cy="25603"/>
+            <a:ext cx="10725912" cy="10973"/>
           </a:xfrm>
           <a:prstGeom prst="rect">
             <a:avLst/>
           </a:prstGeom>
           <a:solidFill>
-            <a:srgbClr val="38C9FF"/>
+            <a:srgbClr val="E2E5E1"/>
           </a:solidFill>
           <a:ln w="12700">
             <a:solidFill>
-              <a:srgbClr val="38C9FF"/>
+              <a:srgbClr val="E2E5E1"/>
             </a:solidFill>
             <a:prstDash val="solid"/>
           </a:ln>
@@ -5465,11 +5465,11 @@
             <a:r>
               <a:rPr lang="en-US" sz="2500" b="1" dirty="0">
                 <a:solidFill>
-                  <a:srgbClr val="4636B0"/>
-                </a:solidFill>
-                <a:latin typeface="Sora" pitchFamily="34" charset="0"/>
-                <a:ea typeface="Sora" pitchFamily="34" charset="-122"/>
-                <a:cs typeface="Sora" pitchFamily="34" charset="-120"/>
+                  <a:srgbClr val="14181A"/>
+                </a:solidFill>
+                <a:latin typeface="Archivo" pitchFamily="34" charset="0"/>
+                <a:ea typeface="Archivo" pitchFamily="34" charset="-122"/>
+                <a:cs typeface="Archivo" pitchFamily="34" charset="-120"/>
               </a:rPr>
               <a:t>Vous n’avez pas eu à nous le demander.</a:t>
             </a:r>
@@ -5510,11 +5510,11 @@
             <a:r>
               <a:rPr lang="en-US" sz="1250" dirty="0">
                 <a:solidFill>
-                  <a:srgbClr val="3D4556"/>
-                </a:solidFill>
-                <a:latin typeface="Inter" pitchFamily="34" charset="0"/>
-                <a:ea typeface="Inter" pitchFamily="34" charset="-122"/>
-                <a:cs typeface="Inter" pitchFamily="34" charset="-120"/>
+                  <a:srgbClr val="3A423F"/>
+                </a:solidFill>
+                <a:latin typeface="Public Sans" pitchFamily="34" charset="0"/>
+                <a:ea typeface="Public Sans" pitchFamily="34" charset="-122"/>
+                <a:cs typeface="Public Sans" pitchFamily="34" charset="-120"/>
               </a:rPr>
               <a:t>Sur ce marché, aucun tarif n'est affiché. On demande un devis, on attend, on reçoit un prix qu'on ne peut comparer à rien.</a:t>
             </a:r>
@@ -5533,11 +5533,11 @@
             <a:r>
               <a:rPr lang="en-US" sz="1250" dirty="0">
                 <a:solidFill>
-                  <a:srgbClr val="3D4556"/>
-                </a:solidFill>
-                <a:latin typeface="Inter" pitchFamily="34" charset="0"/>
-                <a:ea typeface="Inter" pitchFamily="34" charset="-122"/>
-                <a:cs typeface="Inter" pitchFamily="34" charset="-120"/>
+                  <a:srgbClr val="3A423F"/>
+                </a:solidFill>
+                <a:latin typeface="Public Sans" pitchFamily="34" charset="0"/>
+                <a:ea typeface="Public Sans" pitchFamily="34" charset="-122"/>
+                <a:cs typeface="Public Sans" pitchFamily="34" charset="-120"/>
               </a:rPr>
               <a:t>Le nôtre est sur le site, à la vue de vos concurrents comme de vos équipes. Vous savez ce que paie le magasin d'à côté : c'est le même prix.</a:t>
             </a:r>
@@ -5556,11 +5556,11 @@
             <a:r>
               <a:rPr lang="en-US" sz="1250" dirty="0">
                 <a:solidFill>
-                  <a:srgbClr val="3D4556"/>
-                </a:solidFill>
-                <a:latin typeface="Inter" pitchFamily="34" charset="0"/>
-                <a:ea typeface="Inter" pitchFamily="34" charset="-122"/>
-                <a:cs typeface="Inter" pitchFamily="34" charset="-120"/>
+                  <a:srgbClr val="3A423F"/>
+                </a:solidFill>
+                <a:latin typeface="Public Sans" pitchFamily="34" charset="0"/>
+                <a:ea typeface="Public Sans" pitchFamily="34" charset="-122"/>
+                <a:cs typeface="Public Sans" pitchFamily="34" charset="-120"/>
               </a:rPr>
               <a:t>Le devis ne revient que pour deux cas — plusieurs magasins à équiper, ou plus de cent appareils sur un même site.</a:t>
             </a:r>
@@ -5581,7 +5581,7 @@
           </a:xfrm>
           <a:prstGeom prst="roundRect">
             <a:avLst>
-              <a:gd name="adj" fmla="val 1594"/>
+              <a:gd name="adj" fmla="val 797"/>
             </a:avLst>
           </a:prstGeom>
           <a:solidFill>
@@ -5589,7 +5589,7 @@
           </a:solidFill>
           <a:ln w="12700">
             <a:solidFill>
-              <a:srgbClr val="E3E6EE"/>
+              <a:srgbClr val="E2E5E1"/>
             </a:solidFill>
             <a:prstDash val="solid"/>
           </a:ln>
@@ -5646,11 +5646,11 @@
             <a:r>
               <a:rPr lang="en-US" sz="1000" i="1" dirty="0">
                 <a:solidFill>
-                  <a:srgbClr val="5B6475"/>
-                </a:solidFill>
-                <a:latin typeface="Inter" pitchFamily="34" charset="0"/>
-                <a:ea typeface="Inter" pitchFamily="34" charset="-122"/>
-                <a:cs typeface="Inter" pitchFamily="34" charset="-120"/>
+                  <a:srgbClr val="575F5C"/>
+                </a:solidFill>
+                <a:latin typeface="Public Sans" pitchFamily="34" charset="0"/>
+                <a:ea typeface="Public Sans" pitchFamily="34" charset="-122"/>
+                <a:cs typeface="Public Sans" pitchFamily="34" charset="-120"/>
               </a:rPr>
               <a:t>www.quantinvo.com/tarifs</a:t>
             </a:r>
@@ -5685,11 +5685,11 @@
             <a:r>
               <a:rPr lang="en-US" sz="900" dirty="0">
                 <a:solidFill>
-                  <a:srgbClr val="5B6475"/>
-                </a:solidFill>
-                <a:latin typeface="Inter" pitchFamily="34" charset="0"/>
-                <a:ea typeface="Inter" pitchFamily="34" charset="-122"/>
-                <a:cs typeface="Inter" pitchFamily="34" charset="-120"/>
+                  <a:srgbClr val="575F5C"/>
+                </a:solidFill>
+                <a:latin typeface="Public Sans" pitchFamily="34" charset="0"/>
+                <a:ea typeface="Public Sans" pitchFamily="34" charset="-122"/>
+                <a:cs typeface="Public Sans" pitchFamily="34" charset="-120"/>
               </a:rPr>
               <a:t>Quantinvo · tarification · août 2026</a:t>
             </a:r>
@@ -5724,11 +5724,11 @@
             <a:r>
               <a:rPr lang="en-US" sz="900" dirty="0">
                 <a:solidFill>
-                  <a:srgbClr val="5B6475"/>
-                </a:solidFill>
-                <a:latin typeface="Inter" pitchFamily="34" charset="0"/>
-                <a:ea typeface="Inter" pitchFamily="34" charset="-122"/>
-                <a:cs typeface="Inter" pitchFamily="34" charset="-120"/>
+                  <a:srgbClr val="575F5C"/>
+                </a:solidFill>
+                <a:latin typeface="Public Sans" pitchFamily="34" charset="0"/>
+                <a:ea typeface="Public Sans" pitchFamily="34" charset="-122"/>
+                <a:cs typeface="Public Sans" pitchFamily="34" charset="-120"/>
               </a:rPr>
               <a:t>4</a:t>
             </a:r>
@@ -5819,11 +5819,11 @@
             <a:r>
               <a:rPr lang="en-US" sz="1600" b="1" dirty="0">
                 <a:solidFill>
-                  <a:srgbClr val="0B0F19"/>
-                </a:solidFill>
-                <a:latin typeface="Sora" pitchFamily="34" charset="0"/>
-                <a:ea typeface="Sora" pitchFamily="34" charset="-122"/>
-                <a:cs typeface="Sora" pitchFamily="34" charset="-120"/>
+                  <a:srgbClr val="14181A"/>
+                </a:solidFill>
+                <a:latin typeface="Archivo" pitchFamily="34" charset="0"/>
+                <a:ea typeface="Archivo" pitchFamily="34" charset="-122"/>
+                <a:cs typeface="Archivo" pitchFamily="34" charset="-120"/>
               </a:rPr>
               <a:t>Quantinvo</a:t>
             </a:r>
@@ -5858,11 +5858,11 @@
             <a:r>
               <a:rPr lang="en-US" sz="1000" dirty="0">
                 <a:solidFill>
-                  <a:srgbClr val="5B6475"/>
-                </a:solidFill>
-                <a:latin typeface="Inter" pitchFamily="34" charset="0"/>
-                <a:ea typeface="Inter" pitchFamily="34" charset="-122"/>
-                <a:cs typeface="Inter" pitchFamily="34" charset="-120"/>
+                  <a:srgbClr val="575F5C"/>
+                </a:solidFill>
+                <a:latin typeface="Public Sans" pitchFamily="34" charset="0"/>
+                <a:ea typeface="Public Sans" pitchFamily="34" charset="-122"/>
+                <a:cs typeface="Public Sans" pitchFamily="34" charset="-120"/>
               </a:rPr>
               <a:t>Ce qui est compris</a:t>
             </a:r>
@@ -5879,17 +5879,17 @@
         <p:spPr>
           <a:xfrm>
             <a:off x="731520" y="877824"/>
-            <a:ext cx="10725912" cy="25603"/>
+            <a:ext cx="10725912" cy="10973"/>
           </a:xfrm>
           <a:prstGeom prst="rect">
             <a:avLst/>
           </a:prstGeom>
           <a:solidFill>
-            <a:srgbClr val="38C9FF"/>
+            <a:srgbClr val="E2E5E1"/>
           </a:solidFill>
           <a:ln w="12700">
             <a:solidFill>
-              <a:srgbClr val="38C9FF"/>
+              <a:srgbClr val="E2E5E1"/>
             </a:solidFill>
             <a:prstDash val="solid"/>
           </a:ln>
@@ -5925,11 +5925,11 @@
             <a:r>
               <a:rPr lang="en-US" sz="2600" b="1" dirty="0">
                 <a:solidFill>
-                  <a:srgbClr val="4636B0"/>
-                </a:solidFill>
-                <a:latin typeface="Sora" pitchFamily="34" charset="0"/>
-                <a:ea typeface="Sora" pitchFamily="34" charset="-122"/>
-                <a:cs typeface="Sora" pitchFamily="34" charset="-120"/>
+                  <a:srgbClr val="14181A"/>
+                </a:solidFill>
+                <a:latin typeface="Archivo" pitchFamily="34" charset="0"/>
+                <a:ea typeface="Archivo" pitchFamily="34" charset="-122"/>
+                <a:cs typeface="Archivo" pitchFamily="34" charset="-120"/>
               </a:rPr>
               <a:t>Ce que le prix contient, quelle que soit l’offre</a:t>
             </a:r>
@@ -5970,11 +5970,11 @@
             <a:r>
               <a:rPr lang="en-US" sz="1250" b="1" dirty="0">
                 <a:solidFill>
-                  <a:srgbClr val="0B0F19"/>
-                </a:solidFill>
-                <a:latin typeface="Inter" pitchFamily="34" charset="0"/>
-                <a:ea typeface="Inter" pitchFamily="34" charset="-122"/>
-                <a:cs typeface="Inter" pitchFamily="34" charset="-120"/>
+                  <a:srgbClr val="14181A"/>
+                </a:solidFill>
+                <a:latin typeface="Public Sans" pitchFamily="34" charset="0"/>
+                <a:ea typeface="Public Sans" pitchFamily="34" charset="-122"/>
+                <a:cs typeface="Public Sans" pitchFamily="34" charset="-120"/>
               </a:rPr>
               <a:t>Les terminaux. </a:t>
             </a:r>
@@ -5990,11 +5990,11 @@
             <a:r>
               <a:rPr lang="en-US" sz="1250" dirty="0">
                 <a:solidFill>
-                  <a:srgbClr val="3D4556"/>
-                </a:solidFill>
-                <a:latin typeface="Inter" pitchFamily="34" charset="0"/>
-                <a:ea typeface="Inter" pitchFamily="34" charset="-122"/>
-                <a:cs typeface="Inter" pitchFamily="34" charset="-120"/>
+                  <a:srgbClr val="3A423F"/>
+                </a:solidFill>
+                <a:latin typeface="Public Sans" pitchFamily="34" charset="0"/>
+                <a:ea typeface="Public Sans" pitchFamily="34" charset="-122"/>
+                <a:cs typeface="Public Sans" pitchFamily="34" charset="-120"/>
               </a:rPr>
               <a:t>Aucun. Vos équipes comptent avec les téléphones qu'elles ont déjà en poche. Rien à acheter, à louer, à charger la veille ni à remplacer quand un écran casse.</a:t>
             </a:r>
@@ -6013,11 +6013,11 @@
             <a:r>
               <a:rPr lang="en-US" sz="1250" b="1" dirty="0">
                 <a:solidFill>
-                  <a:srgbClr val="0B0F19"/>
-                </a:solidFill>
-                <a:latin typeface="Inter" pitchFamily="34" charset="0"/>
-                <a:ea typeface="Inter" pitchFamily="34" charset="-122"/>
-                <a:cs typeface="Inter" pitchFamily="34" charset="-120"/>
+                  <a:srgbClr val="14181A"/>
+                </a:solidFill>
+                <a:latin typeface="Public Sans" pitchFamily="34" charset="0"/>
+                <a:ea typeface="Public Sans" pitchFamily="34" charset="-122"/>
+                <a:cs typeface="Public Sans" pitchFamily="34" charset="-120"/>
               </a:rPr>
               <a:t>Les mises à jour. </a:t>
             </a:r>
@@ -6033,11 +6033,11 @@
             <a:r>
               <a:rPr lang="en-US" sz="1250" dirty="0">
                 <a:solidFill>
-                  <a:srgbClr val="3D4556"/>
-                </a:solidFill>
-                <a:latin typeface="Inter" pitchFamily="34" charset="0"/>
-                <a:ea typeface="Inter" pitchFamily="34" charset="-122"/>
-                <a:cs typeface="Inter" pitchFamily="34" charset="-120"/>
+                  <a:srgbClr val="3A423F"/>
+                </a:solidFill>
+                <a:latin typeface="Public Sans" pitchFamily="34" charset="0"/>
+                <a:ea typeface="Public Sans" pitchFamily="34" charset="-122"/>
+                <a:cs typeface="Public Sans" pitchFamily="34" charset="-120"/>
               </a:rPr>
               <a:t>Toutes, tout le temps. Il n'y a pas de version ancienne à racheter, pas de palier de maintenance, pas de module en supplément.</a:t>
             </a:r>
@@ -6078,11 +6078,11 @@
             <a:r>
               <a:rPr lang="en-US" sz="1250" b="1" dirty="0">
                 <a:solidFill>
-                  <a:srgbClr val="0B0F19"/>
-                </a:solidFill>
-                <a:latin typeface="Inter" pitchFamily="34" charset="0"/>
-                <a:ea typeface="Inter" pitchFamily="34" charset="-122"/>
-                <a:cs typeface="Inter" pitchFamily="34" charset="-120"/>
+                  <a:srgbClr val="14181A"/>
+                </a:solidFill>
+                <a:latin typeface="Public Sans" pitchFamily="34" charset="0"/>
+                <a:ea typeface="Public Sans" pitchFamily="34" charset="-122"/>
+                <a:cs typeface="Public Sans" pitchFamily="34" charset="-120"/>
               </a:rPr>
               <a:t>Les inventaires. </a:t>
             </a:r>
@@ -6098,11 +6098,11 @@
             <a:r>
               <a:rPr lang="en-US" sz="1250" dirty="0">
                 <a:solidFill>
-                  <a:srgbClr val="3D4556"/>
-                </a:solidFill>
-                <a:latin typeface="Inter" pitchFamily="34" charset="0"/>
-                <a:ea typeface="Inter" pitchFamily="34" charset="-122"/>
-                <a:cs typeface="Inter" pitchFamily="34" charset="-120"/>
+                  <a:srgbClr val="3A423F"/>
+                </a:solidFill>
+                <a:latin typeface="Public Sans" pitchFamily="34" charset="0"/>
+                <a:ea typeface="Public Sans" pitchFamily="34" charset="-122"/>
+                <a:cs typeface="Public Sans" pitchFamily="34" charset="-120"/>
               </a:rPr>
               <a:t>Autant que vous voulez dans l'année : complets, tournants, ciblés sur une marque ou un rayon. C'est ce qui rend l'inventaire tournant possible — il ne se facture pas au passage.</a:t>
             </a:r>
@@ -6121,11 +6121,11 @@
             <a:r>
               <a:rPr lang="en-US" sz="1250" b="1" dirty="0">
                 <a:solidFill>
-                  <a:srgbClr val="0B0F19"/>
-                </a:solidFill>
-                <a:latin typeface="Inter" pitchFamily="34" charset="0"/>
-                <a:ea typeface="Inter" pitchFamily="34" charset="-122"/>
-                <a:cs typeface="Inter" pitchFamily="34" charset="-120"/>
+                  <a:srgbClr val="14181A"/>
+                </a:solidFill>
+                <a:latin typeface="Public Sans" pitchFamily="34" charset="0"/>
+                <a:ea typeface="Public Sans" pitchFamily="34" charset="-122"/>
+                <a:cs typeface="Public Sans" pitchFamily="34" charset="-120"/>
               </a:rPr>
               <a:t>Les comptes. </a:t>
             </a:r>
@@ -6141,11 +6141,11 @@
             <a:r>
               <a:rPr lang="en-US" sz="1250" dirty="0">
                 <a:solidFill>
-                  <a:srgbClr val="3D4556"/>
-                </a:solidFill>
-                <a:latin typeface="Inter" pitchFamily="34" charset="0"/>
-                <a:ea typeface="Inter" pitchFamily="34" charset="-122"/>
-                <a:cs typeface="Inter" pitchFamily="34" charset="-120"/>
+                  <a:srgbClr val="3A423F"/>
+                </a:solidFill>
+                <a:latin typeface="Public Sans" pitchFamily="34" charset="0"/>
+                <a:ea typeface="Public Sans" pitchFamily="34" charset="-122"/>
+                <a:cs typeface="Public Sans" pitchFamily="34" charset="-120"/>
               </a:rPr>
               <a:t>Autant que nécessaire, pour toute l'équipe. Le palier ne compte que les appareils qui scannent en même temps.</a:t>
             </a:r>
@@ -6166,15 +6166,15 @@
           </a:xfrm>
           <a:prstGeom prst="roundRect">
             <a:avLst>
-              <a:gd name="adj" fmla="val 7273"/>
+              <a:gd name="adj" fmla="val 3636"/>
             </a:avLst>
           </a:prstGeom>
           <a:solidFill>
-            <a:srgbClr val="F4F5F9"/>
+            <a:srgbClr val="F2F3F1"/>
           </a:solidFill>
           <a:ln w="12700">
             <a:solidFill>
-              <a:srgbClr val="F4F5F9"/>
+              <a:srgbClr val="F2F3F1"/>
             </a:solidFill>
             <a:prstDash val="solid"/>
           </a:ln>
@@ -6207,11 +6207,11 @@
             <a:r>
               <a:rPr lang="en-US" sz="950" b="1" dirty="0">
                 <a:solidFill>
-                  <a:srgbClr val="5B6475"/>
-                </a:solidFill>
-                <a:latin typeface="Inter" pitchFamily="34" charset="0"/>
-                <a:ea typeface="Inter" pitchFamily="34" charset="-122"/>
-                <a:cs typeface="Inter" pitchFamily="34" charset="-120"/>
+                  <a:srgbClr val="575F5C"/>
+                </a:solidFill>
+                <a:latin typeface="Public Sans" pitchFamily="34" charset="0"/>
+                <a:ea typeface="Public Sans" pitchFamily="34" charset="-122"/>
+                <a:cs typeface="Public Sans" pitchFamily="34" charset="-120"/>
               </a:rPr>
               <a:t>Ce qui ne l’est pas</a:t>
             </a:r>
@@ -6249,11 +6249,11 @@
             <a:r>
               <a:rPr lang="en-US" sz="1150" i="1" dirty="0">
                 <a:solidFill>
-                  <a:srgbClr val="3D4556"/>
-                </a:solidFill>
-                <a:latin typeface="Inter" pitchFamily="34" charset="0"/>
-                <a:ea typeface="Inter" pitchFamily="34" charset="-122"/>
-                <a:cs typeface="Inter" pitchFamily="34" charset="-120"/>
+                  <a:srgbClr val="3A423F"/>
+                </a:solidFill>
+                <a:latin typeface="Public Sans" pitchFamily="34" charset="0"/>
+                <a:ea typeface="Public Sans" pitchFamily="34" charset="-122"/>
+                <a:cs typeface="Public Sans" pitchFamily="34" charset="-120"/>
               </a:rPr>
               <a:t>Le paiement se fait par carte, à la souscription. Un accompagnement sur site, une reprise de données ou un développement spécifique se chiffrent à part — et se disent avant, pas sur la facture.</a:t>
             </a:r>
@@ -6288,11 +6288,11 @@
             <a:r>
               <a:rPr lang="en-US" sz="900" dirty="0">
                 <a:solidFill>
-                  <a:srgbClr val="5B6475"/>
-                </a:solidFill>
-                <a:latin typeface="Inter" pitchFamily="34" charset="0"/>
-                <a:ea typeface="Inter" pitchFamily="34" charset="-122"/>
-                <a:cs typeface="Inter" pitchFamily="34" charset="-120"/>
+                  <a:srgbClr val="575F5C"/>
+                </a:solidFill>
+                <a:latin typeface="Public Sans" pitchFamily="34" charset="0"/>
+                <a:ea typeface="Public Sans" pitchFamily="34" charset="-122"/>
+                <a:cs typeface="Public Sans" pitchFamily="34" charset="-120"/>
               </a:rPr>
               <a:t>Quantinvo · tarification · août 2026</a:t>
             </a:r>
@@ -6327,11 +6327,11 @@
             <a:r>
               <a:rPr lang="en-US" sz="900" dirty="0">
                 <a:solidFill>
-                  <a:srgbClr val="5B6475"/>
-                </a:solidFill>
-                <a:latin typeface="Inter" pitchFamily="34" charset="0"/>
-                <a:ea typeface="Inter" pitchFamily="34" charset="-122"/>
-                <a:cs typeface="Inter" pitchFamily="34" charset="-120"/>
+                  <a:srgbClr val="575F5C"/>
+                </a:solidFill>
+                <a:latin typeface="Public Sans" pitchFamily="34" charset="0"/>
+                <a:ea typeface="Public Sans" pitchFamily="34" charset="-122"/>
+                <a:cs typeface="Public Sans" pitchFamily="34" charset="-120"/>
               </a:rPr>
               <a:t>5</a:t>
             </a:r>
@@ -6422,11 +6422,11 @@
             <a:r>
               <a:rPr lang="en-US" sz="1600" b="1" dirty="0">
                 <a:solidFill>
-                  <a:srgbClr val="0B0F19"/>
-                </a:solidFill>
-                <a:latin typeface="Sora" pitchFamily="34" charset="0"/>
-                <a:ea typeface="Sora" pitchFamily="34" charset="-122"/>
-                <a:cs typeface="Sora" pitchFamily="34" charset="-120"/>
+                  <a:srgbClr val="14181A"/>
+                </a:solidFill>
+                <a:latin typeface="Archivo" pitchFamily="34" charset="0"/>
+                <a:ea typeface="Archivo" pitchFamily="34" charset="-122"/>
+                <a:cs typeface="Archivo" pitchFamily="34" charset="-120"/>
               </a:rPr>
               <a:t>Quantinvo</a:t>
             </a:r>
@@ -6461,11 +6461,11 @@
             <a:r>
               <a:rPr lang="en-US" sz="1000" dirty="0">
                 <a:solidFill>
-                  <a:srgbClr val="5B6475"/>
-                </a:solidFill>
-                <a:latin typeface="Inter" pitchFamily="34" charset="0"/>
-                <a:ea typeface="Inter" pitchFamily="34" charset="-122"/>
-                <a:cs typeface="Inter" pitchFamily="34" charset="-120"/>
+                  <a:srgbClr val="575F5C"/>
+                </a:solidFill>
+                <a:latin typeface="Public Sans" pitchFamily="34" charset="0"/>
+                <a:ea typeface="Public Sans" pitchFamily="34" charset="-122"/>
+                <a:cs typeface="Public Sans" pitchFamily="34" charset="-120"/>
               </a:rPr>
               <a:t>Le dépassement</a:t>
             </a:r>
@@ -6482,17 +6482,17 @@
         <p:spPr>
           <a:xfrm>
             <a:off x="731520" y="877824"/>
-            <a:ext cx="10725912" cy="25603"/>
+            <a:ext cx="10725912" cy="10973"/>
           </a:xfrm>
           <a:prstGeom prst="rect">
             <a:avLst/>
           </a:prstGeom>
           <a:solidFill>
-            <a:srgbClr val="38C9FF"/>
+            <a:srgbClr val="E2E5E1"/>
           </a:solidFill>
           <a:ln w="12700">
             <a:solidFill>
-              <a:srgbClr val="38C9FF"/>
+              <a:srgbClr val="E2E5E1"/>
             </a:solidFill>
             <a:prstDash val="solid"/>
           </a:ln>
@@ -6528,11 +6528,11 @@
             <a:r>
               <a:rPr lang="en-US" sz="2400" i="1" dirty="0">
                 <a:solidFill>
-                  <a:srgbClr val="4636B0"/>
-                </a:solidFill>
-                <a:latin typeface="Sora" pitchFamily="34" charset="0"/>
-                <a:ea typeface="Sora" pitchFamily="34" charset="-122"/>
-                <a:cs typeface="Sora" pitchFamily="34" charset="-120"/>
+                  <a:srgbClr val="14181A"/>
+                </a:solidFill>
+                <a:latin typeface="Archivo" pitchFamily="34" charset="0"/>
+                <a:ea typeface="Archivo" pitchFamily="34" charset="-122"/>
+                <a:cs typeface="Archivo" pitchFamily="34" charset="-120"/>
               </a:rPr>
               <a:t>« On ne refuse jamais un appareil pendant un comptage. »</a:t>
             </a:r>
@@ -6570,11 +6570,11 @@
             <a:r>
               <a:rPr lang="en-US" sz="1200" dirty="0">
                 <a:solidFill>
-                  <a:srgbClr val="5B6475"/>
-                </a:solidFill>
-                <a:latin typeface="Inter" pitchFamily="34" charset="0"/>
-                <a:ea typeface="Inter" pitchFamily="34" charset="-122"/>
-                <a:cs typeface="Inter" pitchFamily="34" charset="-120"/>
+                  <a:srgbClr val="575F5C"/>
+                </a:solidFill>
+                <a:latin typeface="Public Sans" pitchFamily="34" charset="0"/>
+                <a:ea typeface="Public Sans" pitchFamily="34" charset="-122"/>
+                <a:cs typeface="Public Sans" pitchFamily="34" charset="-120"/>
               </a:rPr>
               <a:t>La règle qui a décidé de tout le reste.</a:t>
             </a:r>
@@ -6615,11 +6615,11 @@
             <a:r>
               <a:rPr lang="en-US" sz="1300" b="1" dirty="0">
                 <a:solidFill>
-                  <a:srgbClr val="0B0F19"/>
-                </a:solidFill>
-                <a:latin typeface="Inter" pitchFamily="34" charset="0"/>
-                <a:ea typeface="Inter" pitchFamily="34" charset="-122"/>
-                <a:cs typeface="Inter" pitchFamily="34" charset="-120"/>
+                  <a:srgbClr val="14181A"/>
+                </a:solidFill>
+                <a:latin typeface="Public Sans" pitchFamily="34" charset="0"/>
+                <a:ea typeface="Public Sans" pitchFamily="34" charset="-122"/>
+                <a:cs typeface="Public Sans" pitchFamily="34" charset="-120"/>
               </a:rPr>
               <a:t>Le jour de l’inventaire, rien ne se passe. </a:t>
             </a:r>
@@ -6635,11 +6635,11 @@
             <a:r>
               <a:rPr lang="en-US" sz="1300" dirty="0">
                 <a:solidFill>
-                  <a:srgbClr val="3D4556"/>
-                </a:solidFill>
-                <a:latin typeface="Inter" pitchFamily="34" charset="0"/>
-                <a:ea typeface="Inter" pitchFamily="34" charset="-122"/>
-                <a:cs typeface="Inter" pitchFamily="34" charset="-120"/>
+                  <a:srgbClr val="3A423F"/>
+                </a:solidFill>
+                <a:latin typeface="Public Sans" pitchFamily="34" charset="0"/>
+                <a:ea typeface="Public Sans" pitchFamily="34" charset="-122"/>
+                <a:cs typeface="Public Sans" pitchFamily="34" charset="-120"/>
               </a:rPr>
               <a:t>Vous avez pris Advanced pour vingt appareils, vous êtes vingt-trois un samedi de forte affluence : les vingt-trois comptent. Un outil qui dit non à 22 h, un soir de comptage, ne rend service à personne — et personne n'est là pour lever le blocage.</a:t>
             </a:r>
@@ -6658,11 +6658,11 @@
             <a:r>
               <a:rPr lang="en-US" sz="1300" b="1" dirty="0">
                 <a:solidFill>
-                  <a:srgbClr val="0B0F19"/>
-                </a:solidFill>
-                <a:latin typeface="Inter" pitchFamily="34" charset="0"/>
-                <a:ea typeface="Inter" pitchFamily="34" charset="-122"/>
-                <a:cs typeface="Inter" pitchFamily="34" charset="-120"/>
+                  <a:srgbClr val="14181A"/>
+                </a:solidFill>
+                <a:latin typeface="Public Sans" pitchFamily="34" charset="0"/>
+                <a:ea typeface="Public Sans" pitchFamily="34" charset="-122"/>
+                <a:cs typeface="Public Sans" pitchFamily="34" charset="-120"/>
               </a:rPr>
               <a:t>Le dépassement se règle au renouvellement. </a:t>
             </a:r>
@@ -6678,11 +6678,11 @@
             <a:r>
               <a:rPr lang="en-US" sz="1300" dirty="0">
                 <a:solidFill>
-                  <a:srgbClr val="3D4556"/>
-                </a:solidFill>
-                <a:latin typeface="Inter" pitchFamily="34" charset="0"/>
-                <a:ea typeface="Inter" pitchFamily="34" charset="-122"/>
-                <a:cs typeface="Inter" pitchFamily="34" charset="-120"/>
+                  <a:srgbClr val="3A423F"/>
+                </a:solidFill>
+                <a:latin typeface="Public Sans" pitchFamily="34" charset="0"/>
+                <a:ea typeface="Public Sans" pitchFamily="34" charset="-122"/>
+                <a:cs typeface="Public Sans" pitchFamily="34" charset="-120"/>
               </a:rPr>
               <a:t>S'il est ponctuel, il ne change rien. S'il devient votre habitude, nous passons au palier du dessus à l'échéance suivante, à la date que vous connaissez.</a:t>
             </a:r>
@@ -6701,11 +6701,11 @@
             <a:r>
               <a:rPr lang="en-US" sz="1300" b="1" dirty="0">
                 <a:solidFill>
-                  <a:srgbClr val="0B0F19"/>
-                </a:solidFill>
-                <a:latin typeface="Inter" pitchFamily="34" charset="0"/>
-                <a:ea typeface="Inter" pitchFamily="34" charset="-122"/>
-                <a:cs typeface="Inter" pitchFamily="34" charset="-120"/>
+                  <a:srgbClr val="14181A"/>
+                </a:solidFill>
+                <a:latin typeface="Public Sans" pitchFamily="34" charset="0"/>
+                <a:ea typeface="Public Sans" pitchFamily="34" charset="-122"/>
+                <a:cs typeface="Public Sans" pitchFamily="34" charset="-120"/>
               </a:rPr>
               <a:t>Vous n’avez rien à surveiller. </a:t>
             </a:r>
@@ -6721,11 +6721,11 @@
             <a:r>
               <a:rPr lang="en-US" sz="1300" dirty="0">
                 <a:solidFill>
-                  <a:srgbClr val="3D4556"/>
-                </a:solidFill>
-                <a:latin typeface="Inter" pitchFamily="34" charset="0"/>
-                <a:ea typeface="Inter" pitchFamily="34" charset="-122"/>
-                <a:cs typeface="Inter" pitchFamily="34" charset="-120"/>
+                  <a:srgbClr val="3A423F"/>
+                </a:solidFill>
+                <a:latin typeface="Public Sans" pitchFamily="34" charset="0"/>
+                <a:ea typeface="Public Sans" pitchFamily="34" charset="-122"/>
+                <a:cs typeface="Public Sans" pitchFamily="34" charset="-120"/>
               </a:rPr>
               <a:t>Pas de compteur à consulter chaque mois, pas de régularisation à provisionner, pas de facture surprise en fin d'exercice.</a:t>
             </a:r>
@@ -6760,11 +6760,11 @@
             <a:r>
               <a:rPr lang="en-US" sz="900" dirty="0">
                 <a:solidFill>
-                  <a:srgbClr val="5B6475"/>
-                </a:solidFill>
-                <a:latin typeface="Inter" pitchFamily="34" charset="0"/>
-                <a:ea typeface="Inter" pitchFamily="34" charset="-122"/>
-                <a:cs typeface="Inter" pitchFamily="34" charset="-120"/>
+                  <a:srgbClr val="575F5C"/>
+                </a:solidFill>
+                <a:latin typeface="Public Sans" pitchFamily="34" charset="0"/>
+                <a:ea typeface="Public Sans" pitchFamily="34" charset="-122"/>
+                <a:cs typeface="Public Sans" pitchFamily="34" charset="-120"/>
               </a:rPr>
               <a:t>Quantinvo · tarification · août 2026</a:t>
             </a:r>
@@ -6799,11 +6799,11 @@
             <a:r>
               <a:rPr lang="en-US" sz="900" dirty="0">
                 <a:solidFill>
-                  <a:srgbClr val="5B6475"/>
-                </a:solidFill>
-                <a:latin typeface="Inter" pitchFamily="34" charset="0"/>
-                <a:ea typeface="Inter" pitchFamily="34" charset="-122"/>
-                <a:cs typeface="Inter" pitchFamily="34" charset="-120"/>
+                  <a:srgbClr val="575F5C"/>
+                </a:solidFill>
+                <a:latin typeface="Public Sans" pitchFamily="34" charset="0"/>
+                <a:ea typeface="Public Sans" pitchFamily="34" charset="-122"/>
+                <a:cs typeface="Public Sans" pitchFamily="34" charset="-120"/>
               </a:rPr>
               <a:t>6</a:t>
             </a:r>
@@ -6894,11 +6894,11 @@
             <a:r>
               <a:rPr lang="en-US" sz="1600" b="1" dirty="0">
                 <a:solidFill>
-                  <a:srgbClr val="0B0F19"/>
-                </a:solidFill>
-                <a:latin typeface="Sora" pitchFamily="34" charset="0"/>
-                <a:ea typeface="Sora" pitchFamily="34" charset="-122"/>
-                <a:cs typeface="Sora" pitchFamily="34" charset="-120"/>
+                  <a:srgbClr val="14181A"/>
+                </a:solidFill>
+                <a:latin typeface="Archivo" pitchFamily="34" charset="0"/>
+                <a:ea typeface="Archivo" pitchFamily="34" charset="-122"/>
+                <a:cs typeface="Archivo" pitchFamily="34" charset="-120"/>
               </a:rPr>
               <a:t>Quantinvo</a:t>
             </a:r>
@@ -6933,11 +6933,11 @@
             <a:r>
               <a:rPr lang="en-US" sz="1000" dirty="0">
                 <a:solidFill>
-                  <a:srgbClr val="5B6475"/>
-                </a:solidFill>
-                <a:latin typeface="Inter" pitchFamily="34" charset="0"/>
-                <a:ea typeface="Inter" pitchFamily="34" charset="-122"/>
-                <a:cs typeface="Inter" pitchFamily="34" charset="-120"/>
+                  <a:srgbClr val="575F5C"/>
+                </a:solidFill>
+                <a:latin typeface="Public Sans" pitchFamily="34" charset="0"/>
+                <a:ea typeface="Public Sans" pitchFamily="34" charset="-122"/>
+                <a:cs typeface="Public Sans" pitchFamily="34" charset="-120"/>
               </a:rPr>
               <a:t>Mensuel ou annuel</a:t>
             </a:r>
@@ -6954,17 +6954,17 @@
         <p:spPr>
           <a:xfrm>
             <a:off x="731520" y="877824"/>
-            <a:ext cx="10725912" cy="25603"/>
+            <a:ext cx="10725912" cy="10973"/>
           </a:xfrm>
           <a:prstGeom prst="rect">
             <a:avLst/>
           </a:prstGeom>
           <a:solidFill>
-            <a:srgbClr val="38C9FF"/>
+            <a:srgbClr val="E2E5E1"/>
           </a:solidFill>
           <a:ln w="12700">
             <a:solidFill>
-              <a:srgbClr val="38C9FF"/>
+              <a:srgbClr val="E2E5E1"/>
             </a:solidFill>
             <a:prstDash val="solid"/>
           </a:ln>
@@ -7000,11 +7000,11 @@
             <a:r>
               <a:rPr lang="en-US" sz="2600" b="1" dirty="0">
                 <a:solidFill>
-                  <a:srgbClr val="4636B0"/>
-                </a:solidFill>
-                <a:latin typeface="Sora" pitchFamily="34" charset="0"/>
-                <a:ea typeface="Sora" pitchFamily="34" charset="-122"/>
-                <a:cs typeface="Sora" pitchFamily="34" charset="-120"/>
+                  <a:srgbClr val="14181A"/>
+                </a:solidFill>
+                <a:latin typeface="Archivo" pitchFamily="34" charset="0"/>
+                <a:ea typeface="Archivo" pitchFamily="34" charset="-122"/>
+                <a:cs typeface="Archivo" pitchFamily="34" charset="-120"/>
               </a:rPr>
               <a:t>Douze prélèvements, ou un seul</a:t>
             </a:r>
@@ -7095,11 +7095,11 @@
             <a:r>
               <a:rPr lang="en-US" sz="1050" b="1" dirty="0">
                 <a:solidFill>
-                  <a:srgbClr val="5B6475"/>
-                </a:solidFill>
-                <a:latin typeface="Inter" pitchFamily="34" charset="0"/>
-                <a:ea typeface="Inter" pitchFamily="34" charset="-122"/>
-                <a:cs typeface="Inter" pitchFamily="34" charset="-120"/>
+                  <a:srgbClr val="575F5C"/>
+                </a:solidFill>
+                <a:latin typeface="Public Sans" pitchFamily="34" charset="0"/>
+                <a:ea typeface="Public Sans" pitchFamily="34" charset="-122"/>
+                <a:cs typeface="Public Sans" pitchFamily="34" charset="-120"/>
               </a:rPr>
               <a:t>Par mois</a:t>
             </a:r>
@@ -7134,11 +7134,11 @@
             <a:r>
               <a:rPr lang="en-US" sz="1050" b="1" dirty="0">
                 <a:solidFill>
-                  <a:srgbClr val="5B6475"/>
-                </a:solidFill>
-                <a:latin typeface="Inter" pitchFamily="34" charset="0"/>
-                <a:ea typeface="Inter" pitchFamily="34" charset="-122"/>
-                <a:cs typeface="Inter" pitchFamily="34" charset="-120"/>
+                  <a:srgbClr val="575F5C"/>
+                </a:solidFill>
+                <a:latin typeface="Public Sans" pitchFamily="34" charset="0"/>
+                <a:ea typeface="Public Sans" pitchFamily="34" charset="-122"/>
+                <a:cs typeface="Public Sans" pitchFamily="34" charset="-120"/>
               </a:rPr>
               <a:t>À l’année</a:t>
             </a:r>
@@ -7173,11 +7173,11 @@
             <a:r>
               <a:rPr lang="en-US" sz="1050" b="1" dirty="0">
                 <a:solidFill>
-                  <a:srgbClr val="1F7A5C"/>
-                </a:solidFill>
-                <a:latin typeface="Inter" pitchFamily="34" charset="0"/>
-                <a:ea typeface="Inter" pitchFamily="34" charset="-122"/>
-                <a:cs typeface="Inter" pitchFamily="34" charset="-120"/>
+                  <a:srgbClr val="15704F"/>
+                </a:solidFill>
+                <a:latin typeface="Public Sans" pitchFamily="34" charset="0"/>
+                <a:ea typeface="Public Sans" pitchFamily="34" charset="-122"/>
+                <a:cs typeface="Public Sans" pitchFamily="34" charset="-120"/>
               </a:rPr>
               <a:t>Ce que l’année économise</a:t>
             </a:r>
@@ -7202,7 +7202,7 @@
           <a:noFill/>
           <a:ln w="9525">
             <a:solidFill>
-              <a:srgbClr val="E3E6EE"/>
+              <a:srgbClr val="E2E5E1"/>
             </a:solidFill>
             <a:prstDash val="solid"/>
           </a:ln>
@@ -7235,11 +7235,11 @@
             <a:r>
               <a:rPr lang="en-US" sz="1500" b="1" dirty="0">
                 <a:solidFill>
-                  <a:srgbClr val="0B0F19"/>
-                </a:solidFill>
-                <a:latin typeface="Sora" pitchFamily="34" charset="0"/>
-                <a:ea typeface="Sora" pitchFamily="34" charset="-122"/>
-                <a:cs typeface="Sora" pitchFamily="34" charset="-120"/>
+                  <a:srgbClr val="14181A"/>
+                </a:solidFill>
+                <a:latin typeface="Archivo" pitchFamily="34" charset="0"/>
+                <a:ea typeface="Archivo" pitchFamily="34" charset="-122"/>
+                <a:cs typeface="Archivo" pitchFamily="34" charset="-120"/>
               </a:rPr>
               <a:t>Essential</a:t>
             </a:r>
@@ -7274,11 +7274,11 @@
             <a:r>
               <a:rPr lang="en-US" sz="1700" b="1" dirty="0">
                 <a:solidFill>
-                  <a:srgbClr val="4636B0"/>
-                </a:solidFill>
-                <a:latin typeface="Sora" pitchFamily="34" charset="0"/>
-                <a:ea typeface="Sora" pitchFamily="34" charset="-122"/>
-                <a:cs typeface="Sora" pitchFamily="34" charset="-120"/>
+                  <a:srgbClr val="14181A"/>
+                </a:solidFill>
+                <a:latin typeface="Archivo" pitchFamily="34" charset="0"/>
+                <a:ea typeface="Archivo" pitchFamily="34" charset="-122"/>
+                <a:cs typeface="Archivo" pitchFamily="34" charset="-120"/>
               </a:rPr>
               <a:t>89 €</a:t>
             </a:r>
@@ -7313,11 +7313,11 @@
             <a:r>
               <a:rPr lang="en-US" sz="1700" b="1" dirty="0">
                 <a:solidFill>
-                  <a:srgbClr val="4636B0"/>
-                </a:solidFill>
-                <a:latin typeface="Sora" pitchFamily="34" charset="0"/>
-                <a:ea typeface="Sora" pitchFamily="34" charset="-122"/>
-                <a:cs typeface="Sora" pitchFamily="34" charset="-120"/>
+                  <a:srgbClr val="14181A"/>
+                </a:solidFill>
+                <a:latin typeface="Archivo" pitchFamily="34" charset="0"/>
+                <a:ea typeface="Archivo" pitchFamily="34" charset="-122"/>
+                <a:cs typeface="Archivo" pitchFamily="34" charset="-120"/>
               </a:rPr>
               <a:t>950 €</a:t>
             </a:r>
@@ -7352,11 +7352,11 @@
             <a:r>
               <a:rPr lang="en-US" sz="1700" b="1" dirty="0">
                 <a:solidFill>
-                  <a:srgbClr val="1F7A5C"/>
-                </a:solidFill>
-                <a:latin typeface="Sora" pitchFamily="34" charset="0"/>
-                <a:ea typeface="Sora" pitchFamily="34" charset="-122"/>
-                <a:cs typeface="Sora" pitchFamily="34" charset="-120"/>
+                  <a:srgbClr val="15704F"/>
+                </a:solidFill>
+                <a:latin typeface="Archivo" pitchFamily="34" charset="0"/>
+                <a:ea typeface="Archivo" pitchFamily="34" charset="-122"/>
+                <a:cs typeface="Archivo" pitchFamily="34" charset="-120"/>
               </a:rPr>
               <a:t>118 €</a:t>
             </a:r>
@@ -7391,13 +7391,13 @@
             <a:r>
               <a:rPr lang="en-US" sz="1000" dirty="0">
                 <a:solidFill>
-                  <a:srgbClr val="5B6475"/>
-                </a:solidFill>
-                <a:latin typeface="Inter" pitchFamily="34" charset="0"/>
-                <a:ea typeface="Inter" pitchFamily="34" charset="-122"/>
-                <a:cs typeface="Inter" pitchFamily="34" charset="-120"/>
-              </a:rPr>
-              <a:t>2 appareils</a:t>
+                  <a:srgbClr val="575F5C"/>
+                </a:solidFill>
+                <a:latin typeface="Public Sans" pitchFamily="34" charset="0"/>
+                <a:ea typeface="Public Sans" pitchFamily="34" charset="-122"/>
+                <a:cs typeface="Public Sans" pitchFamily="34" charset="-120"/>
+              </a:rPr>
+              <a:t>Jusqu’à 2 appareils</a:t>
             </a:r>
             <a:endParaRPr lang="en-US" sz="1000" dirty="0"/>
           </a:p>
@@ -7420,7 +7420,7 @@
           <a:noFill/>
           <a:ln w="9525">
             <a:solidFill>
-              <a:srgbClr val="E3E6EE"/>
+              <a:srgbClr val="E2E5E1"/>
             </a:solidFill>
             <a:prstDash val="solid"/>
           </a:ln>
@@ -7453,11 +7453,11 @@
             <a:r>
               <a:rPr lang="en-US" sz="1500" b="1" dirty="0">
                 <a:solidFill>
-                  <a:srgbClr val="0B0F19"/>
-                </a:solidFill>
-                <a:latin typeface="Sora" pitchFamily="34" charset="0"/>
-                <a:ea typeface="Sora" pitchFamily="34" charset="-122"/>
-                <a:cs typeface="Sora" pitchFamily="34" charset="-120"/>
+                  <a:srgbClr val="14181A"/>
+                </a:solidFill>
+                <a:latin typeface="Archivo" pitchFamily="34" charset="0"/>
+                <a:ea typeface="Archivo" pitchFamily="34" charset="-122"/>
+                <a:cs typeface="Archivo" pitchFamily="34" charset="-120"/>
               </a:rPr>
               <a:t>Advanced</a:t>
             </a:r>
@@ -7492,11 +7492,11 @@
             <a:r>
               <a:rPr lang="en-US" sz="1700" b="1" dirty="0">
                 <a:solidFill>
-                  <a:srgbClr val="4636B0"/>
-                </a:solidFill>
-                <a:latin typeface="Sora" pitchFamily="34" charset="0"/>
-                <a:ea typeface="Sora" pitchFamily="34" charset="-122"/>
-                <a:cs typeface="Sora" pitchFamily="34" charset="-120"/>
+                  <a:srgbClr val="14181A"/>
+                </a:solidFill>
+                <a:latin typeface="Archivo" pitchFamily="34" charset="0"/>
+                <a:ea typeface="Archivo" pitchFamily="34" charset="-122"/>
+                <a:cs typeface="Archivo" pitchFamily="34" charset="-120"/>
               </a:rPr>
               <a:t>310 €</a:t>
             </a:r>
@@ -7531,11 +7531,11 @@
             <a:r>
               <a:rPr lang="en-US" sz="1700" b="1" dirty="0">
                 <a:solidFill>
-                  <a:srgbClr val="4636B0"/>
-                </a:solidFill>
-                <a:latin typeface="Sora" pitchFamily="34" charset="0"/>
-                <a:ea typeface="Sora" pitchFamily="34" charset="-122"/>
-                <a:cs typeface="Sora" pitchFamily="34" charset="-120"/>
+                  <a:srgbClr val="14181A"/>
+                </a:solidFill>
+                <a:latin typeface="Archivo" pitchFamily="34" charset="0"/>
+                <a:ea typeface="Archivo" pitchFamily="34" charset="-122"/>
+                <a:cs typeface="Archivo" pitchFamily="34" charset="-120"/>
               </a:rPr>
               <a:t>3 300 €</a:t>
             </a:r>
@@ -7570,11 +7570,11 @@
             <a:r>
               <a:rPr lang="en-US" sz="1700" b="1" dirty="0">
                 <a:solidFill>
-                  <a:srgbClr val="1F7A5C"/>
-                </a:solidFill>
-                <a:latin typeface="Sora" pitchFamily="34" charset="0"/>
-                <a:ea typeface="Sora" pitchFamily="34" charset="-122"/>
-                <a:cs typeface="Sora" pitchFamily="34" charset="-120"/>
+                  <a:srgbClr val="15704F"/>
+                </a:solidFill>
+                <a:latin typeface="Archivo" pitchFamily="34" charset="0"/>
+                <a:ea typeface="Archivo" pitchFamily="34" charset="-122"/>
+                <a:cs typeface="Archivo" pitchFamily="34" charset="-120"/>
               </a:rPr>
               <a:t>420 €</a:t>
             </a:r>
@@ -7609,13 +7609,13 @@
             <a:r>
               <a:rPr lang="en-US" sz="1000" dirty="0">
                 <a:solidFill>
-                  <a:srgbClr val="5B6475"/>
-                </a:solidFill>
-                <a:latin typeface="Inter" pitchFamily="34" charset="0"/>
-                <a:ea typeface="Inter" pitchFamily="34" charset="-122"/>
-                <a:cs typeface="Inter" pitchFamily="34" charset="-120"/>
-              </a:rPr>
-              <a:t>3 à 20 appareils</a:t>
+                  <a:srgbClr val="575F5C"/>
+                </a:solidFill>
+                <a:latin typeface="Public Sans" pitchFamily="34" charset="0"/>
+                <a:ea typeface="Public Sans" pitchFamily="34" charset="-122"/>
+                <a:cs typeface="Public Sans" pitchFamily="34" charset="-120"/>
+              </a:rPr>
+              <a:t>Jusqu’à 20 appareils</a:t>
             </a:r>
             <a:endParaRPr lang="en-US" sz="1000" dirty="0"/>
           </a:p>
@@ -7638,7 +7638,7 @@
           <a:noFill/>
           <a:ln w="9525">
             <a:solidFill>
-              <a:srgbClr val="E3E6EE"/>
+              <a:srgbClr val="E2E5E1"/>
             </a:solidFill>
             <a:prstDash val="solid"/>
           </a:ln>
@@ -7671,11 +7671,11 @@
             <a:r>
               <a:rPr lang="en-US" sz="1500" b="1" dirty="0">
                 <a:solidFill>
-                  <a:srgbClr val="0B0F19"/>
-                </a:solidFill>
-                <a:latin typeface="Sora" pitchFamily="34" charset="0"/>
-                <a:ea typeface="Sora" pitchFamily="34" charset="-122"/>
-                <a:cs typeface="Sora" pitchFamily="34" charset="-120"/>
+                  <a:srgbClr val="14181A"/>
+                </a:solidFill>
+                <a:latin typeface="Archivo" pitchFamily="34" charset="0"/>
+                <a:ea typeface="Archivo" pitchFamily="34" charset="-122"/>
+                <a:cs typeface="Archivo" pitchFamily="34" charset="-120"/>
               </a:rPr>
               <a:t>Enterprise</a:t>
             </a:r>
@@ -7710,11 +7710,11 @@
             <a:r>
               <a:rPr lang="en-US" sz="1700" b="1" dirty="0">
                 <a:solidFill>
-                  <a:srgbClr val="4636B0"/>
-                </a:solidFill>
-                <a:latin typeface="Sora" pitchFamily="34" charset="0"/>
-                <a:ea typeface="Sora" pitchFamily="34" charset="-122"/>
-                <a:cs typeface="Sora" pitchFamily="34" charset="-120"/>
+                  <a:srgbClr val="14181A"/>
+                </a:solidFill>
+                <a:latin typeface="Archivo" pitchFamily="34" charset="0"/>
+                <a:ea typeface="Archivo" pitchFamily="34" charset="-122"/>
+                <a:cs typeface="Archivo" pitchFamily="34" charset="-120"/>
               </a:rPr>
               <a:t>890 €</a:t>
             </a:r>
@@ -7749,11 +7749,11 @@
             <a:r>
               <a:rPr lang="en-US" sz="1700" b="1" dirty="0">
                 <a:solidFill>
-                  <a:srgbClr val="4636B0"/>
-                </a:solidFill>
-                <a:latin typeface="Sora" pitchFamily="34" charset="0"/>
-                <a:ea typeface="Sora" pitchFamily="34" charset="-122"/>
-                <a:cs typeface="Sora" pitchFamily="34" charset="-120"/>
+                  <a:srgbClr val="14181A"/>
+                </a:solidFill>
+                <a:latin typeface="Archivo" pitchFamily="34" charset="0"/>
+                <a:ea typeface="Archivo" pitchFamily="34" charset="-122"/>
+                <a:cs typeface="Archivo" pitchFamily="34" charset="-120"/>
               </a:rPr>
               <a:t>9 450 €</a:t>
             </a:r>
@@ -7788,11 +7788,11 @@
             <a:r>
               <a:rPr lang="en-US" sz="1700" b="1" dirty="0">
                 <a:solidFill>
-                  <a:srgbClr val="1F7A5C"/>
-                </a:solidFill>
-                <a:latin typeface="Sora" pitchFamily="34" charset="0"/>
-                <a:ea typeface="Sora" pitchFamily="34" charset="-122"/>
-                <a:cs typeface="Sora" pitchFamily="34" charset="-120"/>
+                  <a:srgbClr val="15704F"/>
+                </a:solidFill>
+                <a:latin typeface="Archivo" pitchFamily="34" charset="0"/>
+                <a:ea typeface="Archivo" pitchFamily="34" charset="-122"/>
+                <a:cs typeface="Archivo" pitchFamily="34" charset="-120"/>
               </a:rPr>
               <a:t>1 230 €</a:t>
             </a:r>
@@ -7827,13 +7827,13 @@
             <a:r>
               <a:rPr lang="en-US" sz="1000" dirty="0">
                 <a:solidFill>
-                  <a:srgbClr val="5B6475"/>
-                </a:solidFill>
-                <a:latin typeface="Inter" pitchFamily="34" charset="0"/>
-                <a:ea typeface="Inter" pitchFamily="34" charset="-122"/>
-                <a:cs typeface="Inter" pitchFamily="34" charset="-120"/>
-              </a:rPr>
-              <a:t>21 à 100 appareils</a:t>
+                  <a:srgbClr val="575F5C"/>
+                </a:solidFill>
+                <a:latin typeface="Public Sans" pitchFamily="34" charset="0"/>
+                <a:ea typeface="Public Sans" pitchFamily="34" charset="-122"/>
+                <a:cs typeface="Public Sans" pitchFamily="34" charset="-120"/>
+              </a:rPr>
+              <a:t>Jusqu’à 100 appareils</a:t>
             </a:r>
             <a:endParaRPr lang="en-US" sz="1000" dirty="0"/>
           </a:p>
@@ -7856,7 +7856,7 @@
           <a:noFill/>
           <a:ln w="9525">
             <a:solidFill>
-              <a:srgbClr val="E3E6EE"/>
+              <a:srgbClr val="E2E5E1"/>
             </a:solidFill>
             <a:prstDash val="solid"/>
           </a:ln>
@@ -7895,11 +7895,11 @@
             <a:r>
               <a:rPr lang="en-US" sz="1250" b="1" dirty="0">
                 <a:solidFill>
-                  <a:srgbClr val="0B0F19"/>
-                </a:solidFill>
-                <a:latin typeface="Inter" pitchFamily="34" charset="0"/>
-                <a:ea typeface="Inter" pitchFamily="34" charset="-122"/>
-                <a:cs typeface="Inter" pitchFamily="34" charset="-120"/>
+                  <a:srgbClr val="14181A"/>
+                </a:solidFill>
+                <a:latin typeface="Public Sans" pitchFamily="34" charset="0"/>
+                <a:ea typeface="Public Sans" pitchFamily="34" charset="-122"/>
+                <a:cs typeface="Public Sans" pitchFamily="34" charset="-120"/>
               </a:rPr>
               <a:t>Sans engagement. </a:t>
             </a:r>
@@ -7915,11 +7915,11 @@
             <a:r>
               <a:rPr lang="en-US" sz="1250" dirty="0">
                 <a:solidFill>
-                  <a:srgbClr val="3D4556"/>
-                </a:solidFill>
-                <a:latin typeface="Inter" pitchFamily="34" charset="0"/>
-                <a:ea typeface="Inter" pitchFamily="34" charset="-122"/>
-                <a:cs typeface="Inter" pitchFamily="34" charset="-120"/>
+                  <a:srgbClr val="3A423F"/>
+                </a:solidFill>
+                <a:latin typeface="Public Sans" pitchFamily="34" charset="0"/>
+                <a:ea typeface="Public Sans" pitchFamily="34" charset="-122"/>
+                <a:cs typeface="Public Sans" pitchFamily="34" charset="-120"/>
               </a:rPr>
               <a:t>Le mensuel se règle en douze prélèvements et s'arrête quand vous le décidez. L'annuel est dû jusqu'à son terme — c'est la contrepartie de l'économie.</a:t>
             </a:r>
@@ -7940,15 +7940,15 @@
           </a:xfrm>
           <a:prstGeom prst="roundRect">
             <a:avLst>
-              <a:gd name="adj" fmla="val 8000"/>
+              <a:gd name="adj" fmla="val 4000"/>
             </a:avLst>
           </a:prstGeom>
           <a:solidFill>
-            <a:srgbClr val="F4F5F9"/>
+            <a:srgbClr val="F2F3F1"/>
           </a:solidFill>
           <a:ln w="12700">
             <a:solidFill>
-              <a:srgbClr val="F4F5F9"/>
+              <a:srgbClr val="F2F3F1"/>
             </a:solidFill>
             <a:prstDash val="solid"/>
           </a:ln>
@@ -7981,11 +7981,11 @@
             <a:r>
               <a:rPr lang="en-US" sz="950" b="1" dirty="0">
                 <a:solidFill>
-                  <a:srgbClr val="5B6475"/>
-                </a:solidFill>
-                <a:latin typeface="Inter" pitchFamily="34" charset="0"/>
-                <a:ea typeface="Inter" pitchFamily="34" charset="-122"/>
-                <a:cs typeface="Inter" pitchFamily="34" charset="-120"/>
+                  <a:srgbClr val="575F5C"/>
+                </a:solidFill>
+                <a:latin typeface="Public Sans" pitchFamily="34" charset="0"/>
+                <a:ea typeface="Public Sans" pitchFamily="34" charset="-122"/>
+                <a:cs typeface="Public Sans" pitchFamily="34" charset="-120"/>
               </a:rPr>
               <a:t>À savoir</a:t>
             </a:r>
@@ -8023,11 +8023,11 @@
             <a:r>
               <a:rPr lang="en-US" sz="1150" i="1" dirty="0">
                 <a:solidFill>
-                  <a:srgbClr val="3D4556"/>
-                </a:solidFill>
-                <a:latin typeface="Inter" pitchFamily="34" charset="0"/>
-                <a:ea typeface="Inter" pitchFamily="34" charset="-122"/>
-                <a:cs typeface="Inter" pitchFamily="34" charset="-120"/>
+                  <a:srgbClr val="3A423F"/>
+                </a:solidFill>
+                <a:latin typeface="Public Sans" pitchFamily="34" charset="0"/>
+                <a:ea typeface="Public Sans" pitchFamily="34" charset="-122"/>
+                <a:cs typeface="Public Sans" pitchFamily="34" charset="-120"/>
               </a:rPr>
               <a:t>Les prix sont hors taxes, comme partout en B2B. Au moment de payer, l'écran affiche le montant qui sera réellement débité, TVA comprise — on ne découvre pas l'écart sur le relevé bancaire.</a:t>
             </a:r>
@@ -8062,11 +8062,11 @@
             <a:r>
               <a:rPr lang="en-US" sz="900" dirty="0">
                 <a:solidFill>
-                  <a:srgbClr val="5B6475"/>
-                </a:solidFill>
-                <a:latin typeface="Inter" pitchFamily="34" charset="0"/>
-                <a:ea typeface="Inter" pitchFamily="34" charset="-122"/>
-                <a:cs typeface="Inter" pitchFamily="34" charset="-120"/>
+                  <a:srgbClr val="575F5C"/>
+                </a:solidFill>
+                <a:latin typeface="Public Sans" pitchFamily="34" charset="0"/>
+                <a:ea typeface="Public Sans" pitchFamily="34" charset="-122"/>
+                <a:cs typeface="Public Sans" pitchFamily="34" charset="-120"/>
               </a:rPr>
               <a:t>Quantinvo · tarification · août 2026</a:t>
             </a:r>
@@ -8101,11 +8101,11 @@
             <a:r>
               <a:rPr lang="en-US" sz="900" dirty="0">
                 <a:solidFill>
-                  <a:srgbClr val="5B6475"/>
-                </a:solidFill>
-                <a:latin typeface="Inter" pitchFamily="34" charset="0"/>
-                <a:ea typeface="Inter" pitchFamily="34" charset="-122"/>
-                <a:cs typeface="Inter" pitchFamily="34" charset="-120"/>
+                  <a:srgbClr val="575F5C"/>
+                </a:solidFill>
+                <a:latin typeface="Public Sans" pitchFamily="34" charset="0"/>
+                <a:ea typeface="Public Sans" pitchFamily="34" charset="-122"/>
+                <a:cs typeface="Public Sans" pitchFamily="34" charset="-120"/>
               </a:rPr>
               <a:t>7</a:t>
             </a:r>
@@ -8196,11 +8196,11 @@
             <a:r>
               <a:rPr lang="en-US" sz="1600" b="1" dirty="0">
                 <a:solidFill>
-                  <a:srgbClr val="0B0F19"/>
-                </a:solidFill>
-                <a:latin typeface="Sora" pitchFamily="34" charset="0"/>
-                <a:ea typeface="Sora" pitchFamily="34" charset="-122"/>
-                <a:cs typeface="Sora" pitchFamily="34" charset="-120"/>
+                  <a:srgbClr val="14181A"/>
+                </a:solidFill>
+                <a:latin typeface="Archivo" pitchFamily="34" charset="0"/>
+                <a:ea typeface="Archivo" pitchFamily="34" charset="-122"/>
+                <a:cs typeface="Archivo" pitchFamily="34" charset="-120"/>
               </a:rPr>
               <a:t>Quantinvo</a:t>
             </a:r>
@@ -8235,11 +8235,11 @@
             <a:r>
               <a:rPr lang="en-US" sz="1000" dirty="0">
                 <a:solidFill>
-                  <a:srgbClr val="5B6475"/>
-                </a:solidFill>
-                <a:latin typeface="Inter" pitchFamily="34" charset="0"/>
-                <a:ea typeface="Inter" pitchFamily="34" charset="-122"/>
-                <a:cs typeface="Inter" pitchFamily="34" charset="-120"/>
+                  <a:srgbClr val="575F5C"/>
+                </a:solidFill>
+                <a:latin typeface="Public Sans" pitchFamily="34" charset="0"/>
+                <a:ea typeface="Public Sans" pitchFamily="34" charset="-122"/>
+                <a:cs typeface="Public Sans" pitchFamily="34" charset="-120"/>
               </a:rPr>
               <a:t>Souscrire</a:t>
             </a:r>
@@ -8256,17 +8256,17 @@
         <p:spPr>
           <a:xfrm>
             <a:off x="731520" y="877824"/>
-            <a:ext cx="10725912" cy="25603"/>
+            <a:ext cx="10725912" cy="10973"/>
           </a:xfrm>
           <a:prstGeom prst="rect">
             <a:avLst/>
           </a:prstGeom>
           <a:solidFill>
-            <a:srgbClr val="38C9FF"/>
+            <a:srgbClr val="E2E5E1"/>
           </a:solidFill>
           <a:ln w="12700">
             <a:solidFill>
-              <a:srgbClr val="38C9FF"/>
+              <a:srgbClr val="E2E5E1"/>
             </a:solidFill>
             <a:prstDash val="solid"/>
           </a:ln>
@@ -8302,11 +8302,11 @@
             <a:r>
               <a:rPr lang="en-US" sz="2500" b="1" dirty="0">
                 <a:solidFill>
-                  <a:srgbClr val="4636B0"/>
-                </a:solidFill>
-                <a:latin typeface="Sora" pitchFamily="34" charset="0"/>
-                <a:ea typeface="Sora" pitchFamily="34" charset="-122"/>
-                <a:cs typeface="Sora" pitchFamily="34" charset="-120"/>
+                  <a:srgbClr val="14181A"/>
+                </a:solidFill>
+                <a:latin typeface="Archivo" pitchFamily="34" charset="0"/>
+                <a:ea typeface="Archivo" pitchFamily="34" charset="-122"/>
+                <a:cs typeface="Archivo" pitchFamily="34" charset="-120"/>
               </a:rPr>
               <a:t>Quatre informations, puis le paiement.</a:t>
             </a:r>
@@ -8347,11 +8347,11 @@
             <a:r>
               <a:rPr lang="en-US" sz="1250" b="1" dirty="0">
                 <a:solidFill>
-                  <a:srgbClr val="0B0F19"/>
-                </a:solidFill>
-                <a:latin typeface="Inter" pitchFamily="34" charset="0"/>
-                <a:ea typeface="Inter" pitchFamily="34" charset="-122"/>
-                <a:cs typeface="Inter" pitchFamily="34" charset="-120"/>
+                  <a:srgbClr val="14181A"/>
+                </a:solidFill>
+                <a:latin typeface="Public Sans" pitchFamily="34" charset="0"/>
+                <a:ea typeface="Public Sans" pitchFamily="34" charset="-122"/>
+                <a:cs typeface="Public Sans" pitchFamily="34" charset="-120"/>
               </a:rPr>
               <a:t>En ligne, les trois offres comprises. </a:t>
             </a:r>
@@ -8367,11 +8367,11 @@
             <a:r>
               <a:rPr lang="en-US" sz="1250" dirty="0">
                 <a:solidFill>
-                  <a:srgbClr val="3D4556"/>
-                </a:solidFill>
-                <a:latin typeface="Inter" pitchFamily="34" charset="0"/>
-                <a:ea typeface="Inter" pitchFamily="34" charset="-122"/>
-                <a:cs typeface="Inter" pitchFamily="34" charset="-120"/>
+                  <a:srgbClr val="3A423F"/>
+                </a:solidFill>
+                <a:latin typeface="Public Sans" pitchFamily="34" charset="0"/>
+                <a:ea typeface="Public Sans" pitchFamily="34" charset="-122"/>
+                <a:cs typeface="Public Sans" pitchFamily="34" charset="-120"/>
               </a:rPr>
               <a:t>Enterprise se souscrit comme les autres : il n'y a pas de parcours réservé, pas de rendez-vous obligatoire, pas de délai de validation.</a:t>
             </a:r>
@@ -8390,11 +8390,11 @@
             <a:r>
               <a:rPr lang="en-US" sz="1250" b="1" dirty="0">
                 <a:solidFill>
-                  <a:srgbClr val="0B0F19"/>
-                </a:solidFill>
-                <a:latin typeface="Inter" pitchFamily="34" charset="0"/>
-                <a:ea typeface="Inter" pitchFamily="34" charset="-122"/>
-                <a:cs typeface="Inter" pitchFamily="34" charset="-120"/>
+                  <a:srgbClr val="14181A"/>
+                </a:solidFill>
+                <a:latin typeface="Public Sans" pitchFamily="34" charset="0"/>
+                <a:ea typeface="Public Sans" pitchFamily="34" charset="-122"/>
+                <a:cs typeface="Public Sans" pitchFamily="34" charset="-120"/>
               </a:rPr>
               <a:t>Votre espace est créé dès l’encaissement. </a:t>
             </a:r>
@@ -8410,11 +8410,11 @@
             <a:r>
               <a:rPr lang="en-US" sz="1250" dirty="0">
                 <a:solidFill>
-                  <a:srgbClr val="3D4556"/>
-                </a:solidFill>
-                <a:latin typeface="Inter" pitchFamily="34" charset="0"/>
-                <a:ea typeface="Inter" pitchFamily="34" charset="-122"/>
-                <a:cs typeface="Inter" pitchFamily="34" charset="-120"/>
+                  <a:srgbClr val="3A423F"/>
+                </a:solidFill>
+                <a:latin typeface="Public Sans" pitchFamily="34" charset="0"/>
+                <a:ea typeface="Public Sans" pitchFamily="34" charset="-122"/>
+                <a:cs typeface="Public Sans" pitchFamily="34" charset="-120"/>
               </a:rPr>
               <a:t>Vous recevez vos accès par e-mail, vous invitez votre équipe, et le premier inventaire peut se faire le jour même.</a:t>
             </a:r>
@@ -8433,11 +8433,11 @@
             <a:r>
               <a:rPr lang="en-US" sz="1250" b="1" dirty="0">
                 <a:solidFill>
-                  <a:srgbClr val="0B0F19"/>
-                </a:solidFill>
-                <a:latin typeface="Inter" pitchFamily="34" charset="0"/>
-                <a:ea typeface="Inter" pitchFamily="34" charset="-122"/>
-                <a:cs typeface="Inter" pitchFamily="34" charset="-120"/>
+                  <a:srgbClr val="14181A"/>
+                </a:solidFill>
+                <a:latin typeface="Public Sans" pitchFamily="34" charset="0"/>
+                <a:ea typeface="Public Sans" pitchFamily="34" charset="-122"/>
+                <a:cs typeface="Public Sans" pitchFamily="34" charset="-120"/>
               </a:rPr>
               <a:t>La carte ne passe jamais par nous. </a:t>
             </a:r>
@@ -8453,11 +8453,11 @@
             <a:r>
               <a:rPr lang="en-US" sz="1250" dirty="0">
                 <a:solidFill>
-                  <a:srgbClr val="3D4556"/>
-                </a:solidFill>
-                <a:latin typeface="Inter" pitchFamily="34" charset="0"/>
-                <a:ea typeface="Inter" pitchFamily="34" charset="-122"/>
-                <a:cs typeface="Inter" pitchFamily="34" charset="-120"/>
+                  <a:srgbClr val="3A423F"/>
+                </a:solidFill>
+                <a:latin typeface="Public Sans" pitchFamily="34" charset="0"/>
+                <a:ea typeface="Public Sans" pitchFamily="34" charset="-122"/>
+                <a:cs typeface="Public Sans" pitchFamily="34" charset="-120"/>
               </a:rPr>
               <a:t>Le paiement se fait sur la page sécurisée de Stripe. Nous ne voyons pas votre numéro de carte. La facture est émise automatiquement.</a:t>
             </a:r>
@@ -8478,7 +8478,7 @@
           </a:xfrm>
           <a:prstGeom prst="roundRect">
             <a:avLst>
-              <a:gd name="adj" fmla="val 2113"/>
+              <a:gd name="adj" fmla="val 1057"/>
             </a:avLst>
           </a:prstGeom>
           <a:solidFill>
@@ -8486,7 +8486,7 @@
           </a:solidFill>
           <a:ln w="12700">
             <a:solidFill>
-              <a:srgbClr val="E3E6EE"/>
+              <a:srgbClr val="E2E5E1"/>
             </a:solidFill>
             <a:prstDash val="solid"/>
           </a:ln>
@@ -8543,11 +8543,11 @@
             <a:r>
               <a:rPr lang="en-US" sz="1000" i="1" dirty="0">
                 <a:solidFill>
-                  <a:srgbClr val="5B6475"/>
-                </a:solidFill>
-                <a:latin typeface="Inter" pitchFamily="34" charset="0"/>
-                <a:ea typeface="Inter" pitchFamily="34" charset="-122"/>
-                <a:cs typeface="Inter" pitchFamily="34" charset="-120"/>
+                  <a:srgbClr val="575F5C"/>
+                </a:solidFill>
+                <a:latin typeface="Public Sans" pitchFamily="34" charset="0"/>
+                <a:ea typeface="Public Sans" pitchFamily="34" charset="-122"/>
+                <a:cs typeface="Public Sans" pitchFamily="34" charset="-120"/>
               </a:rPr>
               <a:t>www.quantinvo.com/souscrire</a:t>
             </a:r>
@@ -8582,11 +8582,11 @@
             <a:r>
               <a:rPr lang="en-US" sz="900" dirty="0">
                 <a:solidFill>
-                  <a:srgbClr val="5B6475"/>
-                </a:solidFill>
-                <a:latin typeface="Inter" pitchFamily="34" charset="0"/>
-                <a:ea typeface="Inter" pitchFamily="34" charset="-122"/>
-                <a:cs typeface="Inter" pitchFamily="34" charset="-120"/>
+                  <a:srgbClr val="575F5C"/>
+                </a:solidFill>
+                <a:latin typeface="Public Sans" pitchFamily="34" charset="0"/>
+                <a:ea typeface="Public Sans" pitchFamily="34" charset="-122"/>
+                <a:cs typeface="Public Sans" pitchFamily="34" charset="-120"/>
               </a:rPr>
               <a:t>Quantinvo · tarification · août 2026</a:t>
             </a:r>
@@ -8621,11 +8621,11 @@
             <a:r>
               <a:rPr lang="en-US" sz="900" dirty="0">
                 <a:solidFill>
-                  <a:srgbClr val="5B6475"/>
-                </a:solidFill>
-                <a:latin typeface="Inter" pitchFamily="34" charset="0"/>
-                <a:ea typeface="Inter" pitchFamily="34" charset="-122"/>
-                <a:cs typeface="Inter" pitchFamily="34" charset="-120"/>
+                  <a:srgbClr val="575F5C"/>
+                </a:solidFill>
+                <a:latin typeface="Public Sans" pitchFamily="34" charset="0"/>
+                <a:ea typeface="Public Sans" pitchFamily="34" charset="-122"/>
+                <a:cs typeface="Public Sans" pitchFamily="34" charset="-120"/>
               </a:rPr>
               <a:t>8</a:t>
             </a:r>
@@ -8716,11 +8716,11 @@
             <a:r>
               <a:rPr lang="en-US" sz="1600" b="1" dirty="0">
                 <a:solidFill>
-                  <a:srgbClr val="0B0F19"/>
-                </a:solidFill>
-                <a:latin typeface="Sora" pitchFamily="34" charset="0"/>
-                <a:ea typeface="Sora" pitchFamily="34" charset="-122"/>
-                <a:cs typeface="Sora" pitchFamily="34" charset="-120"/>
+                  <a:srgbClr val="14181A"/>
+                </a:solidFill>
+                <a:latin typeface="Archivo" pitchFamily="34" charset="0"/>
+                <a:ea typeface="Archivo" pitchFamily="34" charset="-122"/>
+                <a:cs typeface="Archivo" pitchFamily="34" charset="-120"/>
               </a:rPr>
               <a:t>Quantinvo</a:t>
             </a:r>
@@ -8755,11 +8755,11 @@
             <a:r>
               <a:rPr lang="en-US" sz="1000" dirty="0">
                 <a:solidFill>
-                  <a:srgbClr val="5B6475"/>
-                </a:solidFill>
-                <a:latin typeface="Inter" pitchFamily="34" charset="0"/>
-                <a:ea typeface="Inter" pitchFamily="34" charset="-122"/>
-                <a:cs typeface="Inter" pitchFamily="34" charset="-120"/>
+                  <a:srgbClr val="575F5C"/>
+                </a:solidFill>
+                <a:latin typeface="Public Sans" pitchFamily="34" charset="0"/>
+                <a:ea typeface="Public Sans" pitchFamily="34" charset="-122"/>
+                <a:cs typeface="Public Sans" pitchFamily="34" charset="-120"/>
               </a:rPr>
               <a:t>Les questions qu’on nous pose</a:t>
             </a:r>
@@ -8776,17 +8776,17 @@
         <p:spPr>
           <a:xfrm>
             <a:off x="731520" y="877824"/>
-            <a:ext cx="10725912" cy="25603"/>
+            <a:ext cx="10725912" cy="10973"/>
           </a:xfrm>
           <a:prstGeom prst="rect">
             <a:avLst/>
           </a:prstGeom>
           <a:solidFill>
-            <a:srgbClr val="38C9FF"/>
+            <a:srgbClr val="E2E5E1"/>
           </a:solidFill>
           <a:ln w="12700">
             <a:solidFill>
-              <a:srgbClr val="38C9FF"/>
+              <a:srgbClr val="E2E5E1"/>
             </a:solidFill>
             <a:prstDash val="solid"/>
           </a:ln>
@@ -8822,11 +8822,11 @@
             <a:r>
               <a:rPr lang="en-US" sz="2600" b="1" dirty="0">
                 <a:solidFill>
-                  <a:srgbClr val="4636B0"/>
-                </a:solidFill>
-                <a:latin typeface="Sora" pitchFamily="34" charset="0"/>
-                <a:ea typeface="Sora" pitchFamily="34" charset="-122"/>
-                <a:cs typeface="Sora" pitchFamily="34" charset="-120"/>
+                  <a:srgbClr val="14181A"/>
+                </a:solidFill>
+                <a:latin typeface="Archivo" pitchFamily="34" charset="0"/>
+                <a:ea typeface="Archivo" pitchFamily="34" charset="-122"/>
+                <a:cs typeface="Archivo" pitchFamily="34" charset="-120"/>
               </a:rPr>
               <a:t>Les questions qu’on nous pose</a:t>
             </a:r>
@@ -8864,11 +8864,11 @@
             <a:r>
               <a:rPr lang="en-US" sz="1350" b="1" dirty="0">
                 <a:solidFill>
-                  <a:srgbClr val="4636B0"/>
-                </a:solidFill>
-                <a:latin typeface="Sora" pitchFamily="34" charset="0"/>
-                <a:ea typeface="Sora" pitchFamily="34" charset="-122"/>
-                <a:cs typeface="Sora" pitchFamily="34" charset="-120"/>
+                  <a:srgbClr val="14181A"/>
+                </a:solidFill>
+                <a:latin typeface="Archivo" pitchFamily="34" charset="0"/>
+                <a:ea typeface="Archivo" pitchFamily="34" charset="-122"/>
+                <a:cs typeface="Archivo" pitchFamily="34" charset="-120"/>
               </a:rPr>
               <a:t>Qu'est-ce qu'un « appareil qui compte » ?</a:t>
             </a:r>
@@ -8906,11 +8906,11 @@
             <a:r>
               <a:rPr lang="en-US" sz="1150" dirty="0">
                 <a:solidFill>
-                  <a:srgbClr val="3D4556"/>
-                </a:solidFill>
-                <a:latin typeface="Inter" pitchFamily="34" charset="0"/>
-                <a:ea typeface="Inter" pitchFamily="34" charset="-122"/>
-                <a:cs typeface="Inter" pitchFamily="34" charset="-120"/>
+                  <a:srgbClr val="3A423F"/>
+                </a:solidFill>
+                <a:latin typeface="Public Sans" pitchFamily="34" charset="0"/>
+                <a:ea typeface="Public Sans" pitchFamily="34" charset="-122"/>
+                <a:cs typeface="Public Sans" pitchFamily="34" charset="-120"/>
               </a:rPr>
               <a:t>Un téléphone ou une tablette qui scanne, en même temps que les autres, pendant un inventaire. Changer d'appareil ne change rien à votre facture : c'est le nombre simultané qui compte, pas le parc que vous possédez.</a:t>
             </a:r>
@@ -8948,11 +8948,11 @@
             <a:r>
               <a:rPr lang="en-US" sz="1350" b="1" dirty="0">
                 <a:solidFill>
-                  <a:srgbClr val="4636B0"/>
-                </a:solidFill>
-                <a:latin typeface="Sora" pitchFamily="34" charset="0"/>
-                <a:ea typeface="Sora" pitchFamily="34" charset="-122"/>
-                <a:cs typeface="Sora" pitchFamily="34" charset="-120"/>
+                  <a:srgbClr val="14181A"/>
+                </a:solidFill>
+                <a:latin typeface="Archivo" pitchFamily="34" charset="0"/>
+                <a:ea typeface="Archivo" pitchFamily="34" charset="-122"/>
+                <a:cs typeface="Archivo" pitchFamily="34" charset="-120"/>
               </a:rPr>
               <a:t>Une licence couvre-t-elle plusieurs magasins ?</a:t>
             </a:r>
@@ -8990,11 +8990,11 @@
             <a:r>
               <a:rPr lang="en-US" sz="1150" dirty="0">
                 <a:solidFill>
-                  <a:srgbClr val="3D4556"/>
-                </a:solidFill>
-                <a:latin typeface="Inter" pitchFamily="34" charset="0"/>
-                <a:ea typeface="Inter" pitchFamily="34" charset="-122"/>
-                <a:cs typeface="Inter" pitchFamily="34" charset="-120"/>
+                  <a:srgbClr val="3A423F"/>
+                </a:solidFill>
+                <a:latin typeface="Public Sans" pitchFamily="34" charset="0"/>
+                <a:ea typeface="Public Sans" pitchFamily="34" charset="-122"/>
+                <a:cs typeface="Public Sans" pitchFamily="34" charset="-120"/>
               </a:rPr>
               <a:t>Non. Chaque magasin prend la sienne, choisie selon la taille de son équipe. Si vous en équipez plusieurs, nous établissons un devis pour l'ensemble.</a:t>
             </a:r>
@@ -9032,11 +9032,11 @@
             <a:r>
               <a:rPr lang="en-US" sz="1350" b="1" dirty="0">
                 <a:solidFill>
-                  <a:srgbClr val="4636B0"/>
-                </a:solidFill>
-                <a:latin typeface="Sora" pitchFamily="34" charset="0"/>
-                <a:ea typeface="Sora" pitchFamily="34" charset="-122"/>
-                <a:cs typeface="Sora" pitchFamily="34" charset="-120"/>
+                  <a:srgbClr val="14181A"/>
+                </a:solidFill>
+                <a:latin typeface="Archivo" pitchFamily="34" charset="0"/>
+                <a:ea typeface="Archivo" pitchFamily="34" charset="-122"/>
+                <a:cs typeface="Archivo" pitchFamily="34" charset="-120"/>
               </a:rPr>
               <a:t>Faut-il déclarer notre stock ?</a:t>
             </a:r>
@@ -9074,11 +9074,11 @@
             <a:r>
               <a:rPr lang="en-US" sz="1150" dirty="0">
                 <a:solidFill>
-                  <a:srgbClr val="3D4556"/>
-                </a:solidFill>
-                <a:latin typeface="Inter" pitchFamily="34" charset="0"/>
-                <a:ea typeface="Inter" pitchFamily="34" charset="-122"/>
-                <a:cs typeface="Inter" pitchFamily="34" charset="-120"/>
+                  <a:srgbClr val="3A423F"/>
+                </a:solidFill>
+                <a:latin typeface="Public Sans" pitchFamily="34" charset="0"/>
+                <a:ea typeface="Public Sans" pitchFamily="34" charset="-122"/>
+                <a:cs typeface="Public Sans" pitchFamily="34" charset="-120"/>
               </a:rPr>
               <a:t>Non. Rien à déclarer, rien à justifier, rien à régulariser. C'est précisément ce que cette façon de facturer supprime.</a:t>
             </a:r>
@@ -9116,11 +9116,11 @@
             <a:r>
               <a:rPr lang="en-US" sz="1350" b="1" dirty="0">
                 <a:solidFill>
-                  <a:srgbClr val="4636B0"/>
-                </a:solidFill>
-                <a:latin typeface="Sora" pitchFamily="34" charset="0"/>
-                <a:ea typeface="Sora" pitchFamily="34" charset="-122"/>
-                <a:cs typeface="Sora" pitchFamily="34" charset="-120"/>
+                  <a:srgbClr val="14181A"/>
+                </a:solidFill>
+                <a:latin typeface="Archivo" pitchFamily="34" charset="0"/>
+                <a:ea typeface="Archivo" pitchFamily="34" charset="-122"/>
+                <a:cs typeface="Archivo" pitchFamily="34" charset="-120"/>
               </a:rPr>
               <a:t>Peut-on résilier ?</a:t>
             </a:r>
@@ -9158,11 +9158,11 @@
             <a:r>
               <a:rPr lang="en-US" sz="1150" dirty="0">
                 <a:solidFill>
-                  <a:srgbClr val="3D4556"/>
-                </a:solidFill>
-                <a:latin typeface="Inter" pitchFamily="34" charset="0"/>
-                <a:ea typeface="Inter" pitchFamily="34" charset="-122"/>
-                <a:cs typeface="Inter" pitchFamily="34" charset="-120"/>
+                  <a:srgbClr val="3A423F"/>
+                </a:solidFill>
+                <a:latin typeface="Public Sans" pitchFamily="34" charset="0"/>
+                <a:ea typeface="Public Sans" pitchFamily="34" charset="-122"/>
+                <a:cs typeface="Public Sans" pitchFamily="34" charset="-120"/>
               </a:rPr>
               <a:t>Le mensuel, quand vous voulez : le service va au terme du mois payé. L'annuel est dû jusqu'à son échéance, et ne se reconduit que si vous le décidez.</a:t>
             </a:r>
@@ -9197,11 +9197,11 @@
             <a:r>
               <a:rPr lang="en-US" sz="900" dirty="0">
                 <a:solidFill>
-                  <a:srgbClr val="5B6475"/>
-                </a:solidFill>
-                <a:latin typeface="Inter" pitchFamily="34" charset="0"/>
-                <a:ea typeface="Inter" pitchFamily="34" charset="-122"/>
-                <a:cs typeface="Inter" pitchFamily="34" charset="-120"/>
+                  <a:srgbClr val="575F5C"/>
+                </a:solidFill>
+                <a:latin typeface="Public Sans" pitchFamily="34" charset="0"/>
+                <a:ea typeface="Public Sans" pitchFamily="34" charset="-122"/>
+                <a:cs typeface="Public Sans" pitchFamily="34" charset="-120"/>
               </a:rPr>
               <a:t>Quantinvo · tarification · août 2026</a:t>
             </a:r>
@@ -9236,11 +9236,11 @@
             <a:r>
               <a:rPr lang="en-US" sz="900" dirty="0">
                 <a:solidFill>
-                  <a:srgbClr val="5B6475"/>
-                </a:solidFill>
-                <a:latin typeface="Inter" pitchFamily="34" charset="0"/>
-                <a:ea typeface="Inter" pitchFamily="34" charset="-122"/>
-                <a:cs typeface="Inter" pitchFamily="34" charset="-120"/>
+                  <a:srgbClr val="575F5C"/>
+                </a:solidFill>
+                <a:latin typeface="Public Sans" pitchFamily="34" charset="0"/>
+                <a:ea typeface="Public Sans" pitchFamily="34" charset="-122"/>
+                <a:cs typeface="Public Sans" pitchFamily="34" charset="-120"/>
               </a:rPr>
               <a:t>9</a:t>
             </a:r>
